--- a/lectures/00.relations/Отношения между классами.pptx
+++ b/lectures/00.relations/Отношения между классами.pptx
@@ -5,32 +5,31 @@
     <p:sldMasterId id="2147483648" r:id="rId1"/>
   </p:sldMasterIdLst>
   <p:notesMasterIdLst>
-    <p:notesMasterId r:id="rId25"/>
+    <p:notesMasterId r:id="rId24"/>
   </p:notesMasterIdLst>
   <p:sldIdLst>
     <p:sldId id="426" r:id="rId2"/>
-    <p:sldId id="427" r:id="rId3"/>
-    <p:sldId id="403" r:id="rId4"/>
-    <p:sldId id="404" r:id="rId5"/>
-    <p:sldId id="354" r:id="rId6"/>
-    <p:sldId id="405" r:id="rId7"/>
-    <p:sldId id="357" r:id="rId8"/>
-    <p:sldId id="406" r:id="rId9"/>
-    <p:sldId id="408" r:id="rId10"/>
-    <p:sldId id="411" r:id="rId11"/>
-    <p:sldId id="379" r:id="rId12"/>
-    <p:sldId id="412" r:id="rId13"/>
-    <p:sldId id="366" r:id="rId14"/>
-    <p:sldId id="414" r:id="rId15"/>
-    <p:sldId id="369" r:id="rId16"/>
-    <p:sldId id="370" r:id="rId17"/>
-    <p:sldId id="419" r:id="rId18"/>
-    <p:sldId id="420" r:id="rId19"/>
-    <p:sldId id="421" r:id="rId20"/>
-    <p:sldId id="422" r:id="rId21"/>
-    <p:sldId id="423" r:id="rId22"/>
-    <p:sldId id="424" r:id="rId23"/>
-    <p:sldId id="425" r:id="rId24"/>
+    <p:sldId id="403" r:id="rId3"/>
+    <p:sldId id="404" r:id="rId4"/>
+    <p:sldId id="354" r:id="rId5"/>
+    <p:sldId id="405" r:id="rId6"/>
+    <p:sldId id="357" r:id="rId7"/>
+    <p:sldId id="406" r:id="rId8"/>
+    <p:sldId id="408" r:id="rId9"/>
+    <p:sldId id="411" r:id="rId10"/>
+    <p:sldId id="379" r:id="rId11"/>
+    <p:sldId id="412" r:id="rId12"/>
+    <p:sldId id="366" r:id="rId13"/>
+    <p:sldId id="414" r:id="rId14"/>
+    <p:sldId id="369" r:id="rId15"/>
+    <p:sldId id="370" r:id="rId16"/>
+    <p:sldId id="419" r:id="rId17"/>
+    <p:sldId id="420" r:id="rId18"/>
+    <p:sldId id="421" r:id="rId19"/>
+    <p:sldId id="422" r:id="rId20"/>
+    <p:sldId id="423" r:id="rId21"/>
+    <p:sldId id="424" r:id="rId22"/>
+    <p:sldId id="425" r:id="rId23"/>
   </p:sldIdLst>
   <p:sldSz cx="12192000" cy="6858000"/>
   <p:notesSz cx="6858000" cy="9144000"/>
@@ -135,7 +134,6 @@
         <p14:section name="Default Section" id="{C0DE4342-374D-4506-BDDE-7A69154730CF}">
           <p14:sldIdLst>
             <p14:sldId id="426"/>
-            <p14:sldId id="427"/>
             <p14:sldId id="403"/>
             <p14:sldId id="404"/>
             <p14:sldId id="354"/>
@@ -250,7 +248,7 @@
           <a:p>
             <a:fld id="{759A8C27-CF52-4E7F-AAE7-4D864EAACE7B}" type="datetimeFigureOut">
               <a:rPr lang="ru-RU" smtClean="0"/>
-              <a:t>19.01.2025</a:t>
+              <a:t>12.01.2026</a:t>
             </a:fld>
             <a:endParaRPr lang="ru-RU"/>
           </a:p>
@@ -662,7 +660,7 @@
             <a:fld id="{7AD27560-579B-482E-BED7-036450DE1808}" type="slidenum">
               <a:rPr lang="ru-RU" smtClean="0"/>
               <a:pPr/>
-              <a:t>3</a:t>
+              <a:t>2</a:t>
             </a:fld>
             <a:endParaRPr lang="ru-RU"/>
           </a:p>
@@ -794,7 +792,7 @@
             <a:fld id="{7AD27560-579B-482E-BED7-036450DE1808}" type="slidenum">
               <a:rPr lang="ru-RU" smtClean="0"/>
               <a:pPr/>
-              <a:t>13</a:t>
+              <a:t>12</a:t>
             </a:fld>
             <a:endParaRPr lang="ru-RU"/>
           </a:p>
@@ -973,7 +971,7 @@
             <a:fld id="{7AD27560-579B-482E-BED7-036450DE1808}" type="slidenum">
               <a:rPr lang="ru-RU" smtClean="0"/>
               <a:pPr/>
-              <a:t>14</a:t>
+              <a:t>13</a:t>
             </a:fld>
             <a:endParaRPr lang="ru-RU"/>
           </a:p>
@@ -1164,7 +1162,7 @@
             <a:fld id="{7AD27560-579B-482E-BED7-036450DE1808}" type="slidenum">
               <a:rPr lang="ru-RU" smtClean="0"/>
               <a:pPr/>
-              <a:t>15</a:t>
+              <a:t>14</a:t>
             </a:fld>
             <a:endParaRPr lang="ru-RU"/>
           </a:p>
@@ -1318,7 +1316,7 @@
             <a:fld id="{7AD27560-579B-482E-BED7-036450DE1808}" type="slidenum">
               <a:rPr lang="ru-RU" smtClean="0"/>
               <a:pPr/>
-              <a:t>16</a:t>
+              <a:t>15</a:t>
             </a:fld>
             <a:endParaRPr lang="ru-RU"/>
           </a:p>
@@ -1406,7 +1404,7 @@
             <a:fld id="{7AD27560-579B-482E-BED7-036450DE1808}" type="slidenum">
               <a:rPr lang="ru-RU" smtClean="0"/>
               <a:pPr/>
-              <a:t>18</a:t>
+              <a:t>17</a:t>
             </a:fld>
             <a:endParaRPr lang="ru-RU"/>
           </a:p>
@@ -1530,7 +1528,7 @@
             <a:fld id="{7AD27560-579B-482E-BED7-036450DE1808}" type="slidenum">
               <a:rPr lang="ru-RU" smtClean="0"/>
               <a:pPr/>
-              <a:t>19</a:t>
+              <a:t>18</a:t>
             </a:fld>
             <a:endParaRPr lang="ru-RU"/>
           </a:p>
@@ -1632,7 +1630,7 @@
             <a:fld id="{7AD27560-579B-482E-BED7-036450DE1808}" type="slidenum">
               <a:rPr lang="ru-RU" smtClean="0"/>
               <a:pPr/>
-              <a:t>21</a:t>
+              <a:t>20</a:t>
             </a:fld>
             <a:endParaRPr lang="ru-RU"/>
           </a:p>
@@ -1745,7 +1743,7 @@
             <a:fld id="{7AD27560-579B-482E-BED7-036450DE1808}" type="slidenum">
               <a:rPr lang="ru-RU" smtClean="0"/>
               <a:pPr/>
-              <a:t>4</a:t>
+              <a:t>3</a:t>
             </a:fld>
             <a:endParaRPr lang="ru-RU"/>
           </a:p>
@@ -1887,7 +1885,7 @@
             <a:fld id="{7AD27560-579B-482E-BED7-036450DE1808}" type="slidenum">
               <a:rPr lang="ru-RU" smtClean="0"/>
               <a:pPr/>
-              <a:t>5</a:t>
+              <a:t>4</a:t>
             </a:fld>
             <a:endParaRPr lang="ru-RU"/>
           </a:p>
@@ -2013,7 +2011,7 @@
             <a:fld id="{7AD27560-579B-482E-BED7-036450DE1808}" type="slidenum">
               <a:rPr lang="ru-RU" smtClean="0"/>
               <a:pPr/>
-              <a:t>6</a:t>
+              <a:t>5</a:t>
             </a:fld>
             <a:endParaRPr lang="ru-RU"/>
           </a:p>
@@ -2106,7 +2104,7 @@
             <a:fld id="{7AD27560-579B-482E-BED7-036450DE1808}" type="slidenum">
               <a:rPr lang="ru-RU" smtClean="0"/>
               <a:pPr/>
-              <a:t>7</a:t>
+              <a:t>6</a:t>
             </a:fld>
             <a:endParaRPr lang="ru-RU"/>
           </a:p>
@@ -2229,7 +2227,7 @@
             <a:fld id="{7AD27560-579B-482E-BED7-036450DE1808}" type="slidenum">
               <a:rPr lang="ru-RU" smtClean="0"/>
               <a:pPr/>
-              <a:t>8</a:t>
+              <a:t>7</a:t>
             </a:fld>
             <a:endParaRPr lang="ru-RU"/>
           </a:p>
@@ -2329,7 +2327,7 @@
             <a:fld id="{7AD27560-579B-482E-BED7-036450DE1808}" type="slidenum">
               <a:rPr lang="ru-RU" smtClean="0"/>
               <a:pPr/>
-              <a:t>9</a:t>
+              <a:t>8</a:t>
             </a:fld>
             <a:endParaRPr lang="ru-RU"/>
           </a:p>
@@ -2442,7 +2440,7 @@
             <a:fld id="{7AD27560-579B-482E-BED7-036450DE1808}" type="slidenum">
               <a:rPr lang="ru-RU" smtClean="0"/>
               <a:pPr/>
-              <a:t>10</a:t>
+              <a:t>9</a:t>
             </a:fld>
             <a:endParaRPr lang="ru-RU"/>
           </a:p>
@@ -2544,7 +2542,7 @@
             <a:fld id="{7AD27560-579B-482E-BED7-036450DE1808}" type="slidenum">
               <a:rPr lang="ru-RU" smtClean="0"/>
               <a:pPr/>
-              <a:t>12</a:t>
+              <a:t>11</a:t>
             </a:fld>
             <a:endParaRPr lang="ru-RU"/>
           </a:p>
@@ -2712,7 +2710,7 @@
           <a:p>
             <a:fld id="{F9142338-19C0-4D5B-87F4-D84E00F7CA9F}" type="datetime1">
               <a:rPr lang="ru-RU" smtClean="0"/>
-              <a:t>19.01.2025</a:t>
+              <a:t>12.01.2026</a:t>
             </a:fld>
             <a:endParaRPr lang="ru-RU"/>
           </a:p>
@@ -2912,7 +2910,7 @@
           <a:p>
             <a:fld id="{63435379-0901-4231-AD59-C11B54E6DE39}" type="datetime1">
               <a:rPr lang="ru-RU" smtClean="0"/>
-              <a:t>19.01.2025</a:t>
+              <a:t>12.01.2026</a:t>
             </a:fld>
             <a:endParaRPr lang="ru-RU"/>
           </a:p>
@@ -3122,7 +3120,7 @@
           <a:p>
             <a:fld id="{D09D2BD2-2B61-4104-B801-D48DD70A0351}" type="datetime1">
               <a:rPr lang="ru-RU" smtClean="0"/>
-              <a:t>19.01.2025</a:t>
+              <a:t>12.01.2026</a:t>
             </a:fld>
             <a:endParaRPr lang="ru-RU"/>
           </a:p>
@@ -3322,7 +3320,7 @@
           <a:p>
             <a:fld id="{31046E7A-C0A0-4585-9511-0CC32E1FD9E5}" type="datetime1">
               <a:rPr lang="ru-RU" smtClean="0"/>
-              <a:t>19.01.2025</a:t>
+              <a:t>12.01.2026</a:t>
             </a:fld>
             <a:endParaRPr lang="ru-RU"/>
           </a:p>
@@ -3598,7 +3596,7 @@
           <a:p>
             <a:fld id="{432FA3D6-0ACE-4A6A-A614-8F082567C748}" type="datetime1">
               <a:rPr lang="ru-RU" smtClean="0"/>
-              <a:t>19.01.2025</a:t>
+              <a:t>12.01.2026</a:t>
             </a:fld>
             <a:endParaRPr lang="ru-RU"/>
           </a:p>
@@ -3866,7 +3864,7 @@
           <a:p>
             <a:fld id="{7E27D5AA-C59A-488C-BD40-52249BD73BF2}" type="datetime1">
               <a:rPr lang="ru-RU" smtClean="0"/>
-              <a:t>19.01.2025</a:t>
+              <a:t>12.01.2026</a:t>
             </a:fld>
             <a:endParaRPr lang="ru-RU"/>
           </a:p>
@@ -4281,7 +4279,7 @@
           <a:p>
             <a:fld id="{7C34CB10-256C-4862-8195-7B259579A1DE}" type="datetime1">
               <a:rPr lang="ru-RU" smtClean="0"/>
-              <a:t>19.01.2025</a:t>
+              <a:t>12.01.2026</a:t>
             </a:fld>
             <a:endParaRPr lang="ru-RU"/>
           </a:p>
@@ -4423,7 +4421,7 @@
           <a:p>
             <a:fld id="{FCBE238F-8367-4111-8E77-9E3737855EA3}" type="datetime1">
               <a:rPr lang="ru-RU" smtClean="0"/>
-              <a:t>19.01.2025</a:t>
+              <a:t>12.01.2026</a:t>
             </a:fld>
             <a:endParaRPr lang="ru-RU"/>
           </a:p>
@@ -4536,7 +4534,7 @@
           <a:p>
             <a:fld id="{27777840-E45D-4DAA-BE43-94276BE639C0}" type="datetime1">
               <a:rPr lang="ru-RU" smtClean="0"/>
-              <a:t>19.01.2025</a:t>
+              <a:t>12.01.2026</a:t>
             </a:fld>
             <a:endParaRPr lang="ru-RU"/>
           </a:p>
@@ -4849,7 +4847,7 @@
           <a:p>
             <a:fld id="{01E081C3-C275-49D1-AD29-5B152B9D32A6}" type="datetime1">
               <a:rPr lang="ru-RU" smtClean="0"/>
-              <a:t>19.01.2025</a:t>
+              <a:t>12.01.2026</a:t>
             </a:fld>
             <a:endParaRPr lang="ru-RU"/>
           </a:p>
@@ -5138,7 +5136,7 @@
           <a:p>
             <a:fld id="{453BEC0E-0129-4BAE-BDC5-B0A9F963C45C}" type="datetime1">
               <a:rPr lang="ru-RU" smtClean="0"/>
-              <a:t>19.01.2025</a:t>
+              <a:t>12.01.2026</a:t>
             </a:fld>
             <a:endParaRPr lang="ru-RU"/>
           </a:p>
@@ -5381,7 +5379,7 @@
           <a:p>
             <a:fld id="{0B0E3125-C00F-4E0E-AE42-19C93EAE59FD}" type="datetime1">
               <a:rPr lang="ru-RU" smtClean="0"/>
-              <a:t>19.01.2025</a:t>
+              <a:t>12.01.2026</a:t>
             </a:fld>
             <a:endParaRPr lang="ru-RU"/>
           </a:p>
@@ -5799,50 +5797,20 @@
           <a:chExt cx="0" cy="0"/>
         </a:xfrm>
       </p:grpSpPr>
-      <p:pic>
-        <p:nvPicPr>
-          <p:cNvPr id="5" name="Picture 4">
-            <a:extLst>
-              <a:ext uri="{FF2B5EF4-FFF2-40B4-BE49-F238E27FC236}">
-                <a16:creationId xmlns:a16="http://schemas.microsoft.com/office/drawing/2014/main" id="{754E85F0-DCD6-42D1-0560-0E0070092A4A}"/>
-              </a:ext>
-            </a:extLst>
-          </p:cNvPr>
-          <p:cNvPicPr>
-            <a:picLocks noChangeAspect="1"/>
-          </p:cNvPicPr>
-          <p:nvPr/>
-        </p:nvPicPr>
-        <p:blipFill>
-          <a:blip r:embed="rId2"/>
-          <a:stretch>
-            <a:fillRect/>
-          </a:stretch>
-        </p:blipFill>
+      <p:sp>
+        <p:nvSpPr>
+          <p:cNvPr id="2" name="Заголовок 1"/>
+          <p:cNvSpPr>
+            <a:spLocks noGrp="1"/>
+          </p:cNvSpPr>
+          <p:nvPr>
+            <p:ph type="ctrTitle"/>
+          </p:nvPr>
+        </p:nvSpPr>
         <p:spPr>
           <a:xfrm>
-            <a:off x="0" y="0"/>
-            <a:ext cx="12191999" cy="6858000"/>
-          </a:xfrm>
-          <a:prstGeom prst="rect">
-            <a:avLst/>
-          </a:prstGeom>
-        </p:spPr>
-      </p:pic>
-      <p:sp>
-        <p:nvSpPr>
-          <p:cNvPr id="2" name="Заголовок 1"/>
-          <p:cNvSpPr>
-            <a:spLocks noGrp="1"/>
-          </p:cNvSpPr>
-          <p:nvPr>
-            <p:ph type="ctrTitle"/>
-          </p:nvPr>
-        </p:nvSpPr>
-        <p:spPr>
-          <a:xfrm>
-            <a:off x="1524000" y="1122362"/>
-            <a:ext cx="9144000" cy="4135437"/>
+            <a:off x="1524000" y="1122363"/>
+            <a:ext cx="9144000" cy="2387600"/>
           </a:xfrm>
         </p:spPr>
         <p:txBody>
@@ -5852,19 +5820,7 @@
           <a:lstStyle/>
           <a:p>
             <a:r>
-              <a:rPr lang="ru-RU" sz="8800" dirty="0">
-                <a:solidFill>
-                  <a:schemeClr val="bg1"/>
-                </a:solidFill>
-                <a:effectLst>
-                  <a:outerShdw blurRad="38100" dist="38100" dir="2700000" algn="tl">
-                    <a:srgbClr val="000000">
-                      <a:alpha val="43137"/>
-                    </a:srgbClr>
-                  </a:outerShdw>
-                </a:effectLst>
-                <a:latin typeface="Impact" panose="020B0806030902050204" pitchFamily="34" charset="0"/>
-              </a:rPr>
+              <a:rPr lang="ru-RU" dirty="0"/>
               <a:t>Отношения между классами</a:t>
             </a:r>
           </a:p>
@@ -5872,10 +5828,10 @@
       </p:sp>
       <p:sp>
         <p:nvSpPr>
-          <p:cNvPr id="7" name="Subtitle 6">
+          <p:cNvPr id="4" name="Subtitle 3">
             <a:extLst>
               <a:ext uri="{FF2B5EF4-FFF2-40B4-BE49-F238E27FC236}">
-                <a16:creationId xmlns:a16="http://schemas.microsoft.com/office/drawing/2014/main" id="{7AC0D265-F069-D38F-DBA3-5F7F2D801E44}"/>
+                <a16:creationId xmlns:a16="http://schemas.microsoft.com/office/drawing/2014/main" id="{3CE94875-9E79-DAC4-5E5F-8C234472CC9B}"/>
               </a:ext>
             </a:extLst>
           </p:cNvPr>
@@ -5891,7 +5847,7 @@
           <a:bodyPr/>
           <a:lstStyle/>
           <a:p>
-            <a:endParaRPr lang="en-US" dirty="0"/>
+            <a:endParaRPr lang="en-US"/>
           </a:p>
         </p:txBody>
       </p:sp>
@@ -5909,100 +5865,6 @@
 </file>
 
 <file path=ppt/slides/slide10.xml><?xml version="1.0" encoding="utf-8"?>
-<p:sld xmlns:a="http://schemas.openxmlformats.org/drawingml/2006/main" xmlns:r="http://schemas.openxmlformats.org/officeDocument/2006/relationships" xmlns:p="http://schemas.openxmlformats.org/presentationml/2006/main">
-  <p:cSld>
-    <p:spTree>
-      <p:nvGrpSpPr>
-        <p:cNvPr id="1" name=""/>
-        <p:cNvGrpSpPr/>
-        <p:nvPr/>
-      </p:nvGrpSpPr>
-      <p:grpSpPr>
-        <a:xfrm>
-          <a:off x="0" y="0"/>
-          <a:ext cx="0" cy="0"/>
-          <a:chOff x="0" y="0"/>
-          <a:chExt cx="0" cy="0"/>
-        </a:xfrm>
-      </p:grpSpPr>
-      <p:sp>
-        <p:nvSpPr>
-          <p:cNvPr id="2" name="Заголовок 1">
-            <a:extLst>
-              <a:ext uri="{FF2B5EF4-FFF2-40B4-BE49-F238E27FC236}">
-                <a16:creationId xmlns:a16="http://schemas.microsoft.com/office/drawing/2014/main" id="{D73E1AC1-1020-4294-A077-007A71C780F3}"/>
-              </a:ext>
-            </a:extLst>
-          </p:cNvPr>
-          <p:cNvSpPr>
-            <a:spLocks noGrp="1"/>
-          </p:cNvSpPr>
-          <p:nvPr>
-            <p:ph type="title"/>
-          </p:nvPr>
-        </p:nvSpPr>
-        <p:spPr/>
-        <p:txBody>
-          <a:bodyPr/>
-          <a:lstStyle/>
-          <a:p>
-            <a:r>
-              <a:rPr lang="ru-RU" dirty="0"/>
-              <a:t>Агрегация и делегирование</a:t>
-            </a:r>
-          </a:p>
-        </p:txBody>
-      </p:sp>
-      <p:pic>
-        <p:nvPicPr>
-          <p:cNvPr id="5" name="Рисунок 4">
-            <a:extLst>
-              <a:ext uri="{FF2B5EF4-FFF2-40B4-BE49-F238E27FC236}">
-                <a16:creationId xmlns:a16="http://schemas.microsoft.com/office/drawing/2014/main" id="{CA871CF4-AACF-395E-5682-5A4F4F5F35D0}"/>
-              </a:ext>
-            </a:extLst>
-          </p:cNvPr>
-          <p:cNvPicPr>
-            <a:picLocks noChangeAspect="1"/>
-          </p:cNvPicPr>
-          <p:nvPr/>
-        </p:nvPicPr>
-        <p:blipFill>
-          <a:blip r:embed="rId3">
-            <a:extLst>
-              <a:ext uri="{28A0092B-C50C-407E-A947-70E740481C1C}">
-                <a14:useLocalDpi xmlns:a14="http://schemas.microsoft.com/office/drawing/2010/main" val="0"/>
-              </a:ext>
-            </a:extLst>
-          </a:blip>
-          <a:stretch>
-            <a:fillRect/>
-          </a:stretch>
-        </p:blipFill>
-        <p:spPr>
-          <a:xfrm>
-            <a:off x="2938264" y="2492896"/>
-            <a:ext cx="6470104" cy="3702850"/>
-          </a:xfrm>
-          <a:prstGeom prst="rect">
-            <a:avLst/>
-          </a:prstGeom>
-        </p:spPr>
-      </p:pic>
-    </p:spTree>
-    <p:extLst>
-      <p:ext uri="{BB962C8B-B14F-4D97-AF65-F5344CB8AC3E}">
-        <p14:creationId xmlns:p14="http://schemas.microsoft.com/office/powerpoint/2010/main" val="3997726164"/>
-      </p:ext>
-    </p:extLst>
-  </p:cSld>
-  <p:clrMapOvr>
-    <a:masterClrMapping/>
-  </p:clrMapOvr>
-</p:sld>
-</file>
-
-<file path=ppt/slides/slide11.xml><?xml version="1.0" encoding="utf-8"?>
 <p:sld xmlns:a="http://schemas.openxmlformats.org/drawingml/2006/main" xmlns:r="http://schemas.openxmlformats.org/officeDocument/2006/relationships" xmlns:p="http://schemas.openxmlformats.org/presentationml/2006/main">
   <p:cSld>
     <p:spTree>
@@ -6107,7 +5969,7 @@
 </p:sld>
 </file>
 
-<file path=ppt/slides/slide12.xml><?xml version="1.0" encoding="utf-8"?>
+<file path=ppt/slides/slide11.xml><?xml version="1.0" encoding="utf-8"?>
 <p:sld xmlns:a="http://schemas.openxmlformats.org/drawingml/2006/main" xmlns:r="http://schemas.openxmlformats.org/officeDocument/2006/relationships" xmlns:p="http://schemas.openxmlformats.org/presentationml/2006/main">
   <p:cSld>
     <p:spTree>
@@ -6195,7 +6057,7 @@
 </p:sld>
 </file>
 
-<file path=ppt/slides/slide13.xml><?xml version="1.0" encoding="utf-8"?>
+<file path=ppt/slides/slide12.xml><?xml version="1.0" encoding="utf-8"?>
 <p:sld xmlns:a="http://schemas.openxmlformats.org/drawingml/2006/main" xmlns:r="http://schemas.openxmlformats.org/officeDocument/2006/relationships" xmlns:p="http://schemas.openxmlformats.org/presentationml/2006/main">
   <p:cSld>
     <p:spTree>
@@ -6726,7 +6588,7 @@
 </p:sld>
 </file>
 
-<file path=ppt/slides/slide14.xml><?xml version="1.0" encoding="utf-8"?>
+<file path=ppt/slides/slide13.xml><?xml version="1.0" encoding="utf-8"?>
 <p:sld xmlns:a="http://schemas.openxmlformats.org/drawingml/2006/main" xmlns:r="http://schemas.openxmlformats.org/officeDocument/2006/relationships" xmlns:p="http://schemas.openxmlformats.org/presentationml/2006/main">
   <p:cSld>
     <p:spTree>
@@ -8951,7 +8813,7 @@
 </p:sld>
 </file>
 
-<file path=ppt/slides/slide15.xml><?xml version="1.0" encoding="utf-8"?>
+<file path=ppt/slides/slide14.xml><?xml version="1.0" encoding="utf-8"?>
 <p:sld xmlns:a="http://schemas.openxmlformats.org/drawingml/2006/main" xmlns:r="http://schemas.openxmlformats.org/officeDocument/2006/relationships" xmlns:p="http://schemas.openxmlformats.org/presentationml/2006/main">
   <p:cSld>
     <p:spTree>
@@ -9230,7 +9092,7 @@
 </p:sld>
 </file>
 
-<file path=ppt/slides/slide16.xml><?xml version="1.0" encoding="utf-8"?>
+<file path=ppt/slides/slide15.xml><?xml version="1.0" encoding="utf-8"?>
 <p:sld xmlns:a="http://schemas.openxmlformats.org/drawingml/2006/main" xmlns:r="http://schemas.openxmlformats.org/officeDocument/2006/relationships" xmlns:p="http://schemas.openxmlformats.org/presentationml/2006/main">
   <p:cSld>
     <p:spTree>
@@ -9335,6 +9197,118 @@
 </p:sld>
 </file>
 
+<file path=ppt/slides/slide16.xml><?xml version="1.0" encoding="utf-8"?>
+<p:sld xmlns:a="http://schemas.openxmlformats.org/drawingml/2006/main" xmlns:r="http://schemas.openxmlformats.org/officeDocument/2006/relationships" xmlns:p="http://schemas.openxmlformats.org/presentationml/2006/main">
+  <p:cSld>
+    <p:spTree>
+      <p:nvGrpSpPr>
+        <p:cNvPr id="1" name=""/>
+        <p:cNvGrpSpPr/>
+        <p:nvPr/>
+      </p:nvGrpSpPr>
+      <p:grpSpPr>
+        <a:xfrm>
+          <a:off x="0" y="0"/>
+          <a:ext cx="0" cy="0"/>
+          <a:chOff x="0" y="0"/>
+          <a:chExt cx="0" cy="0"/>
+        </a:xfrm>
+      </p:grpSpPr>
+      <p:sp>
+        <p:nvSpPr>
+          <p:cNvPr id="3" name="Title 2">
+            <a:extLst>
+              <a:ext uri="{FF2B5EF4-FFF2-40B4-BE49-F238E27FC236}">
+                <a16:creationId xmlns:a16="http://schemas.microsoft.com/office/drawing/2014/main" id="{8EBF5C1F-8EB7-440F-83AA-83349F6B13E2}"/>
+              </a:ext>
+            </a:extLst>
+          </p:cNvPr>
+          <p:cNvSpPr>
+            <a:spLocks noGrp="1"/>
+          </p:cNvSpPr>
+          <p:nvPr>
+            <p:ph type="title"/>
+          </p:nvPr>
+        </p:nvSpPr>
+        <p:spPr/>
+        <p:txBody>
+          <a:bodyPr/>
+          <a:lstStyle/>
+          <a:p>
+            <a:r>
+              <a:rPr lang="ru-RU" dirty="0"/>
+              <a:t>Наследование</a:t>
+            </a:r>
+          </a:p>
+        </p:txBody>
+      </p:sp>
+      <p:sp>
+        <p:nvSpPr>
+          <p:cNvPr id="4" name="Text Placeholder 3">
+            <a:extLst>
+              <a:ext uri="{FF2B5EF4-FFF2-40B4-BE49-F238E27FC236}">
+                <a16:creationId xmlns:a16="http://schemas.microsoft.com/office/drawing/2014/main" id="{CA3C3619-47C0-4CBE-ABA2-016231C4599B}"/>
+              </a:ext>
+            </a:extLst>
+          </p:cNvPr>
+          <p:cNvSpPr>
+            <a:spLocks noGrp="1"/>
+          </p:cNvSpPr>
+          <p:nvPr>
+            <p:ph type="body" idx="1"/>
+          </p:nvPr>
+        </p:nvSpPr>
+        <p:spPr/>
+        <p:txBody>
+          <a:bodyPr/>
+          <a:lstStyle/>
+          <a:p>
+            <a:endParaRPr lang="ru-RU"/>
+          </a:p>
+        </p:txBody>
+      </p:sp>
+      <p:sp>
+        <p:nvSpPr>
+          <p:cNvPr id="5" name="Slide Number Placeholder 4">
+            <a:extLst>
+              <a:ext uri="{FF2B5EF4-FFF2-40B4-BE49-F238E27FC236}">
+                <a16:creationId xmlns:a16="http://schemas.microsoft.com/office/drawing/2014/main" id="{60CBB147-5EA7-452D-8899-B16743B909FE}"/>
+              </a:ext>
+            </a:extLst>
+          </p:cNvPr>
+          <p:cNvSpPr>
+            <a:spLocks noGrp="1"/>
+          </p:cNvSpPr>
+          <p:nvPr>
+            <p:ph type="sldNum" sz="quarter" idx="12"/>
+          </p:nvPr>
+        </p:nvSpPr>
+        <p:spPr/>
+        <p:txBody>
+          <a:bodyPr/>
+          <a:lstStyle/>
+          <a:p>
+            <a:fld id="{B28E8911-E3D6-4AD9-AA24-3D7604D2F44D}" type="slidenum">
+              <a:rPr lang="ru-RU" smtClean="0"/>
+              <a:t>16</a:t>
+            </a:fld>
+            <a:endParaRPr lang="ru-RU"/>
+          </a:p>
+        </p:txBody>
+      </p:sp>
+    </p:spTree>
+    <p:extLst>
+      <p:ext uri="{BB962C8B-B14F-4D97-AF65-F5344CB8AC3E}">
+        <p14:creationId xmlns:p14="http://schemas.microsoft.com/office/powerpoint/2010/main" val="647450312"/>
+      </p:ext>
+    </p:extLst>
+  </p:cSld>
+  <p:clrMapOvr>
+    <a:masterClrMapping/>
+  </p:clrMapOvr>
+</p:sld>
+</file>
+
 <file path=ppt/slides/slide17.xml><?xml version="1.0" encoding="utf-8"?>
 <p:sld xmlns:a="http://schemas.openxmlformats.org/drawingml/2006/main" xmlns:r="http://schemas.openxmlformats.org/officeDocument/2006/relationships" xmlns:p="http://schemas.openxmlformats.org/presentationml/2006/main">
   <p:cSld>
@@ -9354,118 +9328,6 @@
       </p:grpSpPr>
       <p:sp>
         <p:nvSpPr>
-          <p:cNvPr id="3" name="Title 2">
-            <a:extLst>
-              <a:ext uri="{FF2B5EF4-FFF2-40B4-BE49-F238E27FC236}">
-                <a16:creationId xmlns:a16="http://schemas.microsoft.com/office/drawing/2014/main" id="{8EBF5C1F-8EB7-440F-83AA-83349F6B13E2}"/>
-              </a:ext>
-            </a:extLst>
-          </p:cNvPr>
-          <p:cNvSpPr>
-            <a:spLocks noGrp="1"/>
-          </p:cNvSpPr>
-          <p:nvPr>
-            <p:ph type="title"/>
-          </p:nvPr>
-        </p:nvSpPr>
-        <p:spPr/>
-        <p:txBody>
-          <a:bodyPr/>
-          <a:lstStyle/>
-          <a:p>
-            <a:r>
-              <a:rPr lang="ru-RU" dirty="0"/>
-              <a:t>Наследование</a:t>
-            </a:r>
-          </a:p>
-        </p:txBody>
-      </p:sp>
-      <p:sp>
-        <p:nvSpPr>
-          <p:cNvPr id="4" name="Text Placeholder 3">
-            <a:extLst>
-              <a:ext uri="{FF2B5EF4-FFF2-40B4-BE49-F238E27FC236}">
-                <a16:creationId xmlns:a16="http://schemas.microsoft.com/office/drawing/2014/main" id="{CA3C3619-47C0-4CBE-ABA2-016231C4599B}"/>
-              </a:ext>
-            </a:extLst>
-          </p:cNvPr>
-          <p:cNvSpPr>
-            <a:spLocks noGrp="1"/>
-          </p:cNvSpPr>
-          <p:nvPr>
-            <p:ph type="body" idx="1"/>
-          </p:nvPr>
-        </p:nvSpPr>
-        <p:spPr/>
-        <p:txBody>
-          <a:bodyPr/>
-          <a:lstStyle/>
-          <a:p>
-            <a:endParaRPr lang="ru-RU"/>
-          </a:p>
-        </p:txBody>
-      </p:sp>
-      <p:sp>
-        <p:nvSpPr>
-          <p:cNvPr id="5" name="Slide Number Placeholder 4">
-            <a:extLst>
-              <a:ext uri="{FF2B5EF4-FFF2-40B4-BE49-F238E27FC236}">
-                <a16:creationId xmlns:a16="http://schemas.microsoft.com/office/drawing/2014/main" id="{60CBB147-5EA7-452D-8899-B16743B909FE}"/>
-              </a:ext>
-            </a:extLst>
-          </p:cNvPr>
-          <p:cNvSpPr>
-            <a:spLocks noGrp="1"/>
-          </p:cNvSpPr>
-          <p:nvPr>
-            <p:ph type="sldNum" sz="quarter" idx="12"/>
-          </p:nvPr>
-        </p:nvSpPr>
-        <p:spPr/>
-        <p:txBody>
-          <a:bodyPr/>
-          <a:lstStyle/>
-          <a:p>
-            <a:fld id="{B28E8911-E3D6-4AD9-AA24-3D7604D2F44D}" type="slidenum">
-              <a:rPr lang="ru-RU" smtClean="0"/>
-              <a:t>17</a:t>
-            </a:fld>
-            <a:endParaRPr lang="ru-RU"/>
-          </a:p>
-        </p:txBody>
-      </p:sp>
-    </p:spTree>
-    <p:extLst>
-      <p:ext uri="{BB962C8B-B14F-4D97-AF65-F5344CB8AC3E}">
-        <p14:creationId xmlns:p14="http://schemas.microsoft.com/office/powerpoint/2010/main" val="647450312"/>
-      </p:ext>
-    </p:extLst>
-  </p:cSld>
-  <p:clrMapOvr>
-    <a:masterClrMapping/>
-  </p:clrMapOvr>
-</p:sld>
-</file>
-
-<file path=ppt/slides/slide18.xml><?xml version="1.0" encoding="utf-8"?>
-<p:sld xmlns:a="http://schemas.openxmlformats.org/drawingml/2006/main" xmlns:r="http://schemas.openxmlformats.org/officeDocument/2006/relationships" xmlns:p="http://schemas.openxmlformats.org/presentationml/2006/main">
-  <p:cSld>
-    <p:spTree>
-      <p:nvGrpSpPr>
-        <p:cNvPr id="1" name=""/>
-        <p:cNvGrpSpPr/>
-        <p:nvPr/>
-      </p:nvGrpSpPr>
-      <p:grpSpPr>
-        <a:xfrm>
-          <a:off x="0" y="0"/>
-          <a:ext cx="0" cy="0"/>
-          <a:chOff x="0" y="0"/>
-          <a:chExt cx="0" cy="0"/>
-        </a:xfrm>
-      </p:grpSpPr>
-      <p:sp>
-        <p:nvSpPr>
           <p:cNvPr id="2" name="Заголовок 1">
             <a:extLst>
               <a:ext uri="{FF2B5EF4-FFF2-40B4-BE49-F238E27FC236}">
@@ -9555,7 +9417,7 @@
           <a:p>
             <a:fld id="{B28E8911-E3D6-4AD9-AA24-3D7604D2F44D}" type="slidenum">
               <a:rPr lang="ru-RU" smtClean="0"/>
-              <a:t>18</a:t>
+              <a:t>17</a:t>
             </a:fld>
             <a:endParaRPr lang="ru-RU"/>
           </a:p>
@@ -9574,7 +9436,7 @@
 </p:sld>
 </file>
 
-<file path=ppt/slides/slide19.xml><?xml version="1.0" encoding="utf-8"?>
+<file path=ppt/slides/slide18.xml><?xml version="1.0" encoding="utf-8"?>
 <p:sld xmlns:a="http://schemas.openxmlformats.org/drawingml/2006/main" xmlns:r="http://schemas.openxmlformats.org/officeDocument/2006/relationships" xmlns:p="http://schemas.openxmlformats.org/presentationml/2006/main">
   <p:cSld>
     <p:spTree>
@@ -9680,7 +9542,7 @@
           <a:p>
             <a:fld id="{B28E8911-E3D6-4AD9-AA24-3D7604D2F44D}" type="slidenum">
               <a:rPr lang="ru-RU" smtClean="0"/>
-              <a:t>19</a:t>
+              <a:t>18</a:t>
             </a:fld>
             <a:endParaRPr lang="ru-RU"/>
           </a:p>
@@ -9699,176 +9561,7 @@
 </p:sld>
 </file>
 
-<file path=ppt/slides/slide2.xml><?xml version="1.0" encoding="utf-8"?>
-<p:sld xmlns:a="http://schemas.openxmlformats.org/drawingml/2006/main" xmlns:r="http://schemas.openxmlformats.org/officeDocument/2006/relationships" xmlns:p="http://schemas.openxmlformats.org/presentationml/2006/main" show="0">
-  <p:cSld>
-    <p:spTree>
-      <p:nvGrpSpPr>
-        <p:cNvPr id="1" name="">
-          <a:extLst>
-            <a:ext uri="{FF2B5EF4-FFF2-40B4-BE49-F238E27FC236}">
-              <a16:creationId xmlns:a16="http://schemas.microsoft.com/office/drawing/2014/main" id="{4E366DF7-0BF3-8083-6FBA-588750A44E03}"/>
-            </a:ext>
-          </a:extLst>
-        </p:cNvPr>
-        <p:cNvGrpSpPr/>
-        <p:nvPr/>
-      </p:nvGrpSpPr>
-      <p:grpSpPr>
-        <a:xfrm>
-          <a:off x="0" y="0"/>
-          <a:ext cx="0" cy="0"/>
-          <a:chOff x="0" y="0"/>
-          <a:chExt cx="0" cy="0"/>
-        </a:xfrm>
-      </p:grpSpPr>
-      <p:pic>
-        <p:nvPicPr>
-          <p:cNvPr id="5" name="Picture 4">
-            <a:extLst>
-              <a:ext uri="{FF2B5EF4-FFF2-40B4-BE49-F238E27FC236}">
-                <a16:creationId xmlns:a16="http://schemas.microsoft.com/office/drawing/2014/main" id="{6F4B2185-D39F-82C2-B491-0CEBF9BF3446}"/>
-              </a:ext>
-            </a:extLst>
-          </p:cNvPr>
-          <p:cNvPicPr>
-            <a:picLocks noChangeAspect="1"/>
-          </p:cNvPicPr>
-          <p:nvPr/>
-        </p:nvPicPr>
-        <p:blipFill>
-          <a:blip r:embed="rId2"/>
-          <a:stretch>
-            <a:fillRect/>
-          </a:stretch>
-        </p:blipFill>
-        <p:spPr>
-          <a:xfrm>
-            <a:off x="0" y="0"/>
-            <a:ext cx="12191999" cy="6858000"/>
-          </a:xfrm>
-          <a:prstGeom prst="rect">
-            <a:avLst/>
-          </a:prstGeom>
-        </p:spPr>
-      </p:pic>
-      <p:sp>
-        <p:nvSpPr>
-          <p:cNvPr id="2" name="Заголовок 1">
-            <a:extLst>
-              <a:ext uri="{FF2B5EF4-FFF2-40B4-BE49-F238E27FC236}">
-                <a16:creationId xmlns:a16="http://schemas.microsoft.com/office/drawing/2014/main" id="{7A0B5C75-B458-6C30-A3A7-98D267C3D294}"/>
-              </a:ext>
-            </a:extLst>
-          </p:cNvPr>
-          <p:cNvSpPr>
-            <a:spLocks noGrp="1"/>
-          </p:cNvSpPr>
-          <p:nvPr>
-            <p:ph type="ctrTitle"/>
-          </p:nvPr>
-        </p:nvSpPr>
-        <p:spPr>
-          <a:xfrm>
-            <a:off x="1524000" y="1122362"/>
-            <a:ext cx="9144000" cy="4652796"/>
-          </a:xfrm>
-        </p:spPr>
-        <p:txBody>
-          <a:bodyPr>
-            <a:noAutofit/>
-          </a:bodyPr>
-          <a:lstStyle/>
-          <a:p>
-            <a:r>
-              <a:rPr lang="ru-RU" sz="8800" dirty="0">
-                <a:solidFill>
-                  <a:schemeClr val="bg1"/>
-                </a:solidFill>
-                <a:effectLst>
-                  <a:outerShdw blurRad="38100" dist="38100" dir="2700000" algn="tl">
-                    <a:srgbClr val="000000">
-                      <a:alpha val="43137"/>
-                    </a:srgbClr>
-                  </a:outerShdw>
-                </a:effectLst>
-                <a:latin typeface="Impact" panose="020B0806030902050204" pitchFamily="34" charset="0"/>
-              </a:rPr>
-              <a:t>Объектно-ориентированное проектирование</a:t>
-            </a:r>
-            <a:br>
-              <a:rPr lang="ru-RU" sz="8800" dirty="0">
-                <a:solidFill>
-                  <a:schemeClr val="bg1"/>
-                </a:solidFill>
-                <a:effectLst>
-                  <a:outerShdw blurRad="38100" dist="38100" dir="2700000" algn="tl">
-                    <a:srgbClr val="000000">
-                      <a:alpha val="43137"/>
-                    </a:srgbClr>
-                  </a:outerShdw>
-                </a:effectLst>
-                <a:latin typeface="Impact" panose="020B0806030902050204" pitchFamily="34" charset="0"/>
-              </a:rPr>
-            </a:br>
-            <a:r>
-              <a:rPr lang="ru-RU" sz="8800" dirty="0">
-                <a:solidFill>
-                  <a:schemeClr val="bg1"/>
-                </a:solidFill>
-                <a:effectLst>
-                  <a:outerShdw blurRad="38100" dist="38100" dir="2700000" algn="tl">
-                    <a:srgbClr val="000000">
-                      <a:alpha val="43137"/>
-                    </a:srgbClr>
-                  </a:outerShdw>
-                </a:effectLst>
-                <a:latin typeface="Impact" panose="020B0806030902050204" pitchFamily="34" charset="0"/>
-              </a:rPr>
-              <a:t>2024</a:t>
-            </a:r>
-          </a:p>
-        </p:txBody>
-      </p:sp>
-      <p:sp>
-        <p:nvSpPr>
-          <p:cNvPr id="7" name="Subtitle 6">
-            <a:extLst>
-              <a:ext uri="{FF2B5EF4-FFF2-40B4-BE49-F238E27FC236}">
-                <a16:creationId xmlns:a16="http://schemas.microsoft.com/office/drawing/2014/main" id="{3D97BDAD-C790-AB94-C16B-ED29C67CBF9E}"/>
-              </a:ext>
-            </a:extLst>
-          </p:cNvPr>
-          <p:cNvSpPr>
-            <a:spLocks noGrp="1"/>
-          </p:cNvSpPr>
-          <p:nvPr>
-            <p:ph type="subTitle" idx="1"/>
-          </p:nvPr>
-        </p:nvSpPr>
-        <p:spPr/>
-        <p:txBody>
-          <a:bodyPr/>
-          <a:lstStyle/>
-          <a:p>
-            <a:endParaRPr lang="en-US" dirty="0"/>
-          </a:p>
-        </p:txBody>
-      </p:sp>
-    </p:spTree>
-    <p:extLst>
-      <p:ext uri="{BB962C8B-B14F-4D97-AF65-F5344CB8AC3E}">
-        <p14:creationId xmlns:p14="http://schemas.microsoft.com/office/powerpoint/2010/main" val="1501740091"/>
-      </p:ext>
-    </p:extLst>
-  </p:cSld>
-  <p:clrMapOvr>
-    <a:masterClrMapping/>
-  </p:clrMapOvr>
-</p:sld>
-</file>
-
-<file path=ppt/slides/slide20.xml><?xml version="1.0" encoding="utf-8"?>
+<file path=ppt/slides/slide19.xml><?xml version="1.0" encoding="utf-8"?>
 <p:sld xmlns:a="http://schemas.openxmlformats.org/drawingml/2006/main" xmlns:r="http://schemas.openxmlformats.org/officeDocument/2006/relationships" xmlns:p="http://schemas.openxmlformats.org/presentationml/2006/main">
   <p:cSld>
     <p:spTree>
@@ -9961,7 +9654,7 @@
           <a:p>
             <a:fld id="{B28E8911-E3D6-4AD9-AA24-3D7604D2F44D}" type="slidenum">
               <a:rPr lang="ru-RU" smtClean="0"/>
-              <a:t>20</a:t>
+              <a:t>19</a:t>
             </a:fld>
             <a:endParaRPr lang="ru-RU"/>
           </a:p>
@@ -9980,365 +9673,7 @@
 </p:sld>
 </file>
 
-<file path=ppt/slides/slide21.xml><?xml version="1.0" encoding="utf-8"?>
-<p:sld xmlns:a="http://schemas.openxmlformats.org/drawingml/2006/main" xmlns:r="http://schemas.openxmlformats.org/officeDocument/2006/relationships" xmlns:p="http://schemas.openxmlformats.org/presentationml/2006/main">
-  <p:cSld>
-    <p:spTree>
-      <p:nvGrpSpPr>
-        <p:cNvPr id="1" name=""/>
-        <p:cNvGrpSpPr/>
-        <p:nvPr/>
-      </p:nvGrpSpPr>
-      <p:grpSpPr>
-        <a:xfrm>
-          <a:off x="0" y="0"/>
-          <a:ext cx="0" cy="0"/>
-          <a:chOff x="0" y="0"/>
-          <a:chExt cx="0" cy="0"/>
-        </a:xfrm>
-      </p:grpSpPr>
-      <p:pic>
-        <p:nvPicPr>
-          <p:cNvPr id="5" name="Рисунок 4">
-            <a:extLst>
-              <a:ext uri="{FF2B5EF4-FFF2-40B4-BE49-F238E27FC236}">
-                <a16:creationId xmlns:a16="http://schemas.microsoft.com/office/drawing/2014/main" id="{452DA270-CB7E-8B00-5A03-197D05BB2847}"/>
-              </a:ext>
-            </a:extLst>
-          </p:cNvPr>
-          <p:cNvPicPr>
-            <a:picLocks noChangeAspect="1"/>
-          </p:cNvPicPr>
-          <p:nvPr/>
-        </p:nvPicPr>
-        <p:blipFill>
-          <a:blip r:embed="rId3">
-            <a:extLst>
-              <a:ext uri="{28A0092B-C50C-407E-A947-70E740481C1C}">
-                <a14:useLocalDpi xmlns:a14="http://schemas.microsoft.com/office/drawing/2010/main" val="0"/>
-              </a:ext>
-            </a:extLst>
-          </a:blip>
-          <a:stretch>
-            <a:fillRect/>
-          </a:stretch>
-        </p:blipFill>
-        <p:spPr>
-          <a:xfrm>
-            <a:off x="1919536" y="3500439"/>
-            <a:ext cx="8172400" cy="1922055"/>
-          </a:xfrm>
-          <a:prstGeom prst="rect">
-            <a:avLst/>
-          </a:prstGeom>
-        </p:spPr>
-      </p:pic>
-      <p:sp>
-        <p:nvSpPr>
-          <p:cNvPr id="4" name="Title 3">
-            <a:extLst>
-              <a:ext uri="{FF2B5EF4-FFF2-40B4-BE49-F238E27FC236}">
-                <a16:creationId xmlns:a16="http://schemas.microsoft.com/office/drawing/2014/main" id="{F9EC0F0A-A4A6-472E-AB37-B92F93F1056C}"/>
-              </a:ext>
-            </a:extLst>
-          </p:cNvPr>
-          <p:cNvSpPr>
-            <a:spLocks noGrp="1"/>
-          </p:cNvSpPr>
-          <p:nvPr>
-            <p:ph type="title"/>
-          </p:nvPr>
-        </p:nvSpPr>
-        <p:spPr/>
-        <p:txBody>
-          <a:bodyPr/>
-          <a:lstStyle/>
-          <a:p>
-            <a:r>
-              <a:rPr lang="ru-RU" dirty="0"/>
-              <a:t>Обозначение интерфейса</a:t>
-            </a:r>
-          </a:p>
-        </p:txBody>
-      </p:sp>
-      <p:sp>
-        <p:nvSpPr>
-          <p:cNvPr id="6" name="Slide Number Placeholder 5">
-            <a:extLst>
-              <a:ext uri="{FF2B5EF4-FFF2-40B4-BE49-F238E27FC236}">
-                <a16:creationId xmlns:a16="http://schemas.microsoft.com/office/drawing/2014/main" id="{5D7B596E-DA3A-4FA1-9260-CE5589845767}"/>
-              </a:ext>
-            </a:extLst>
-          </p:cNvPr>
-          <p:cNvSpPr>
-            <a:spLocks noGrp="1"/>
-          </p:cNvSpPr>
-          <p:nvPr>
-            <p:ph type="sldNum" sz="quarter" idx="12"/>
-          </p:nvPr>
-        </p:nvSpPr>
-        <p:spPr/>
-        <p:txBody>
-          <a:bodyPr/>
-          <a:lstStyle/>
-          <a:p>
-            <a:fld id="{B28E8911-E3D6-4AD9-AA24-3D7604D2F44D}" type="slidenum">
-              <a:rPr lang="ru-RU" smtClean="0"/>
-              <a:t>21</a:t>
-            </a:fld>
-            <a:endParaRPr lang="ru-RU"/>
-          </a:p>
-        </p:txBody>
-      </p:sp>
-    </p:spTree>
-    <p:extLst>
-      <p:ext uri="{BB962C8B-B14F-4D97-AF65-F5344CB8AC3E}">
-        <p14:creationId xmlns:p14="http://schemas.microsoft.com/office/powerpoint/2010/main" val="640609002"/>
-      </p:ext>
-    </p:extLst>
-  </p:cSld>
-  <p:clrMapOvr>
-    <a:masterClrMapping/>
-  </p:clrMapOvr>
-</p:sld>
-</file>
-
-<file path=ppt/slides/slide22.xml><?xml version="1.0" encoding="utf-8"?>
-<p:sld xmlns:a="http://schemas.openxmlformats.org/drawingml/2006/main" xmlns:r="http://schemas.openxmlformats.org/officeDocument/2006/relationships" xmlns:p="http://schemas.openxmlformats.org/presentationml/2006/main">
-  <p:cSld>
-    <p:spTree>
-      <p:nvGrpSpPr>
-        <p:cNvPr id="1" name=""/>
-        <p:cNvGrpSpPr/>
-        <p:nvPr/>
-      </p:nvGrpSpPr>
-      <p:grpSpPr>
-        <a:xfrm>
-          <a:off x="0" y="0"/>
-          <a:ext cx="0" cy="0"/>
-          <a:chOff x="0" y="0"/>
-          <a:chExt cx="0" cy="0"/>
-        </a:xfrm>
-      </p:grpSpPr>
-      <p:sp>
-        <p:nvSpPr>
-          <p:cNvPr id="3" name="Title 2">
-            <a:extLst>
-              <a:ext uri="{FF2B5EF4-FFF2-40B4-BE49-F238E27FC236}">
-                <a16:creationId xmlns:a16="http://schemas.microsoft.com/office/drawing/2014/main" id="{AD20A85F-E557-4665-A30A-B0D4CCF0920F}"/>
-              </a:ext>
-            </a:extLst>
-          </p:cNvPr>
-          <p:cNvSpPr>
-            <a:spLocks noGrp="1"/>
-          </p:cNvSpPr>
-          <p:nvPr>
-            <p:ph type="title"/>
-          </p:nvPr>
-        </p:nvSpPr>
-        <p:spPr/>
-        <p:txBody>
-          <a:bodyPr/>
-          <a:lstStyle/>
-          <a:p>
-            <a:r>
-              <a:rPr lang="ru-RU" dirty="0"/>
-              <a:t>Реализация интерфейса</a:t>
-            </a:r>
-          </a:p>
-        </p:txBody>
-      </p:sp>
-      <p:sp>
-        <p:nvSpPr>
-          <p:cNvPr id="4" name="Text Placeholder 3">
-            <a:extLst>
-              <a:ext uri="{FF2B5EF4-FFF2-40B4-BE49-F238E27FC236}">
-                <a16:creationId xmlns:a16="http://schemas.microsoft.com/office/drawing/2014/main" id="{A14DD752-76D8-4068-A767-76069DC8340B}"/>
-              </a:ext>
-            </a:extLst>
-          </p:cNvPr>
-          <p:cNvSpPr>
-            <a:spLocks noGrp="1"/>
-          </p:cNvSpPr>
-          <p:nvPr>
-            <p:ph type="body" idx="1"/>
-          </p:nvPr>
-        </p:nvSpPr>
-        <p:spPr/>
-        <p:txBody>
-          <a:bodyPr/>
-          <a:lstStyle/>
-          <a:p>
-            <a:endParaRPr lang="ru-RU"/>
-          </a:p>
-        </p:txBody>
-      </p:sp>
-      <p:sp>
-        <p:nvSpPr>
-          <p:cNvPr id="2" name="Slide Number Placeholder 1">
-            <a:extLst>
-              <a:ext uri="{FF2B5EF4-FFF2-40B4-BE49-F238E27FC236}">
-                <a16:creationId xmlns:a16="http://schemas.microsoft.com/office/drawing/2014/main" id="{F467DA6F-952A-418D-A83A-62E966CBBEA3}"/>
-              </a:ext>
-            </a:extLst>
-          </p:cNvPr>
-          <p:cNvSpPr>
-            <a:spLocks noGrp="1"/>
-          </p:cNvSpPr>
-          <p:nvPr>
-            <p:ph type="sldNum" sz="quarter" idx="12"/>
-          </p:nvPr>
-        </p:nvSpPr>
-        <p:spPr/>
-        <p:txBody>
-          <a:bodyPr/>
-          <a:lstStyle/>
-          <a:p>
-            <a:fld id="{B28E8911-E3D6-4AD9-AA24-3D7604D2F44D}" type="slidenum">
-              <a:rPr lang="ru-RU" smtClean="0"/>
-              <a:t>22</a:t>
-            </a:fld>
-            <a:endParaRPr lang="ru-RU"/>
-          </a:p>
-        </p:txBody>
-      </p:sp>
-    </p:spTree>
-    <p:extLst>
-      <p:ext uri="{BB962C8B-B14F-4D97-AF65-F5344CB8AC3E}">
-        <p14:creationId xmlns:p14="http://schemas.microsoft.com/office/powerpoint/2010/main" val="2367856906"/>
-      </p:ext>
-    </p:extLst>
-  </p:cSld>
-  <p:clrMapOvr>
-    <a:masterClrMapping/>
-  </p:clrMapOvr>
-</p:sld>
-</file>
-
-<file path=ppt/slides/slide23.xml><?xml version="1.0" encoding="utf-8"?>
-<p:sld xmlns:a="http://schemas.openxmlformats.org/drawingml/2006/main" xmlns:r="http://schemas.openxmlformats.org/officeDocument/2006/relationships" xmlns:p="http://schemas.openxmlformats.org/presentationml/2006/main">
-  <p:cSld>
-    <p:spTree>
-      <p:nvGrpSpPr>
-        <p:cNvPr id="1" name=""/>
-        <p:cNvGrpSpPr/>
-        <p:nvPr/>
-      </p:nvGrpSpPr>
-      <p:grpSpPr>
-        <a:xfrm>
-          <a:off x="0" y="0"/>
-          <a:ext cx="0" cy="0"/>
-          <a:chOff x="0" y="0"/>
-          <a:chExt cx="0" cy="0"/>
-        </a:xfrm>
-      </p:grpSpPr>
-      <p:sp>
-        <p:nvSpPr>
-          <p:cNvPr id="2" name="Title 1">
-            <a:extLst>
-              <a:ext uri="{FF2B5EF4-FFF2-40B4-BE49-F238E27FC236}">
-                <a16:creationId xmlns:a16="http://schemas.microsoft.com/office/drawing/2014/main" id="{CBF18DEB-8DC1-40F2-8D25-8A130A9D752D}"/>
-              </a:ext>
-            </a:extLst>
-          </p:cNvPr>
-          <p:cNvSpPr>
-            <a:spLocks noGrp="1"/>
-          </p:cNvSpPr>
-          <p:nvPr>
-            <p:ph type="title"/>
-          </p:nvPr>
-        </p:nvSpPr>
-        <p:spPr/>
-        <p:txBody>
-          <a:bodyPr/>
-          <a:lstStyle/>
-          <a:p>
-            <a:r>
-              <a:rPr lang="ru-RU" dirty="0"/>
-              <a:t>Обозначение на диаграмме</a:t>
-            </a:r>
-          </a:p>
-        </p:txBody>
-      </p:sp>
-      <p:pic>
-        <p:nvPicPr>
-          <p:cNvPr id="5" name="Объект 4">
-            <a:extLst>
-              <a:ext uri="{FF2B5EF4-FFF2-40B4-BE49-F238E27FC236}">
-                <a16:creationId xmlns:a16="http://schemas.microsoft.com/office/drawing/2014/main" id="{29A911D7-AE2A-44B4-89C9-8741FF9005E8}"/>
-              </a:ext>
-            </a:extLst>
-          </p:cNvPr>
-          <p:cNvPicPr>
-            <a:picLocks noChangeAspect="1"/>
-          </p:cNvPicPr>
-          <p:nvPr/>
-        </p:nvPicPr>
-        <p:blipFill>
-          <a:blip r:embed="rId2">
-            <a:extLst>
-              <a:ext uri="{28A0092B-C50C-407E-A947-70E740481C1C}">
-                <a14:useLocalDpi xmlns:a14="http://schemas.microsoft.com/office/drawing/2010/main" val="0"/>
-              </a:ext>
-            </a:extLst>
-          </a:blip>
-          <a:stretch>
-            <a:fillRect/>
-          </a:stretch>
-        </p:blipFill>
-        <p:spPr>
-          <a:xfrm>
-            <a:off x="4984716" y="1690687"/>
-            <a:ext cx="3379028" cy="4943393"/>
-          </a:xfrm>
-          <a:prstGeom prst="rect">
-            <a:avLst/>
-          </a:prstGeom>
-        </p:spPr>
-      </p:pic>
-      <p:sp>
-        <p:nvSpPr>
-          <p:cNvPr id="6" name="Slide Number Placeholder 5">
-            <a:extLst>
-              <a:ext uri="{FF2B5EF4-FFF2-40B4-BE49-F238E27FC236}">
-                <a16:creationId xmlns:a16="http://schemas.microsoft.com/office/drawing/2014/main" id="{B320C541-292C-44F4-8485-CDBDEAE9DAC5}"/>
-              </a:ext>
-            </a:extLst>
-          </p:cNvPr>
-          <p:cNvSpPr>
-            <a:spLocks noGrp="1"/>
-          </p:cNvSpPr>
-          <p:nvPr>
-            <p:ph type="sldNum" sz="quarter" idx="12"/>
-          </p:nvPr>
-        </p:nvSpPr>
-        <p:spPr/>
-        <p:txBody>
-          <a:bodyPr/>
-          <a:lstStyle/>
-          <a:p>
-            <a:fld id="{B28E8911-E3D6-4AD9-AA24-3D7604D2F44D}" type="slidenum">
-              <a:rPr lang="ru-RU" smtClean="0"/>
-              <a:t>23</a:t>
-            </a:fld>
-            <a:endParaRPr lang="ru-RU"/>
-          </a:p>
-        </p:txBody>
-      </p:sp>
-    </p:spTree>
-    <p:extLst>
-      <p:ext uri="{BB962C8B-B14F-4D97-AF65-F5344CB8AC3E}">
-        <p14:creationId xmlns:p14="http://schemas.microsoft.com/office/powerpoint/2010/main" val="241955883"/>
-      </p:ext>
-    </p:extLst>
-  </p:cSld>
-  <p:clrMapOvr>
-    <a:masterClrMapping/>
-  </p:clrMapOvr>
-</p:sld>
-</file>
-
-<file path=ppt/slides/slide3.xml><?xml version="1.0" encoding="utf-8"?>
+<file path=ppt/slides/slide2.xml><?xml version="1.0" encoding="utf-8"?>
 <p:sld xmlns:a="http://schemas.openxmlformats.org/drawingml/2006/main" xmlns:r="http://schemas.openxmlformats.org/officeDocument/2006/relationships" xmlns:p="http://schemas.openxmlformats.org/presentationml/2006/main">
   <p:cSld>
     <p:spTree>
@@ -10558,7 +9893,7 @@
 </p:sld>
 </file>
 
-<file path=ppt/slides/slide4.xml><?xml version="1.0" encoding="utf-8"?>
+<file path=ppt/slides/slide20.xml><?xml version="1.0" encoding="utf-8"?>
 <p:sld xmlns:a="http://schemas.openxmlformats.org/drawingml/2006/main" xmlns:r="http://schemas.openxmlformats.org/officeDocument/2006/relationships" xmlns:p="http://schemas.openxmlformats.org/presentationml/2006/main">
   <p:cSld>
     <p:spTree>
@@ -10575,6 +9910,364 @@
           <a:chExt cx="0" cy="0"/>
         </a:xfrm>
       </p:grpSpPr>
+      <p:pic>
+        <p:nvPicPr>
+          <p:cNvPr id="5" name="Рисунок 4">
+            <a:extLst>
+              <a:ext uri="{FF2B5EF4-FFF2-40B4-BE49-F238E27FC236}">
+                <a16:creationId xmlns:a16="http://schemas.microsoft.com/office/drawing/2014/main" id="{452DA270-CB7E-8B00-5A03-197D05BB2847}"/>
+              </a:ext>
+            </a:extLst>
+          </p:cNvPr>
+          <p:cNvPicPr>
+            <a:picLocks noChangeAspect="1"/>
+          </p:cNvPicPr>
+          <p:nvPr/>
+        </p:nvPicPr>
+        <p:blipFill>
+          <a:blip r:embed="rId3">
+            <a:extLst>
+              <a:ext uri="{28A0092B-C50C-407E-A947-70E740481C1C}">
+                <a14:useLocalDpi xmlns:a14="http://schemas.microsoft.com/office/drawing/2010/main" val="0"/>
+              </a:ext>
+            </a:extLst>
+          </a:blip>
+          <a:stretch>
+            <a:fillRect/>
+          </a:stretch>
+        </p:blipFill>
+        <p:spPr>
+          <a:xfrm>
+            <a:off x="1919536" y="3500439"/>
+            <a:ext cx="8172400" cy="1922055"/>
+          </a:xfrm>
+          <a:prstGeom prst="rect">
+            <a:avLst/>
+          </a:prstGeom>
+        </p:spPr>
+      </p:pic>
+      <p:sp>
+        <p:nvSpPr>
+          <p:cNvPr id="4" name="Title 3">
+            <a:extLst>
+              <a:ext uri="{FF2B5EF4-FFF2-40B4-BE49-F238E27FC236}">
+                <a16:creationId xmlns:a16="http://schemas.microsoft.com/office/drawing/2014/main" id="{F9EC0F0A-A4A6-472E-AB37-B92F93F1056C}"/>
+              </a:ext>
+            </a:extLst>
+          </p:cNvPr>
+          <p:cNvSpPr>
+            <a:spLocks noGrp="1"/>
+          </p:cNvSpPr>
+          <p:nvPr>
+            <p:ph type="title"/>
+          </p:nvPr>
+        </p:nvSpPr>
+        <p:spPr/>
+        <p:txBody>
+          <a:bodyPr/>
+          <a:lstStyle/>
+          <a:p>
+            <a:r>
+              <a:rPr lang="ru-RU" dirty="0"/>
+              <a:t>Обозначение интерфейса</a:t>
+            </a:r>
+          </a:p>
+        </p:txBody>
+      </p:sp>
+      <p:sp>
+        <p:nvSpPr>
+          <p:cNvPr id="6" name="Slide Number Placeholder 5">
+            <a:extLst>
+              <a:ext uri="{FF2B5EF4-FFF2-40B4-BE49-F238E27FC236}">
+                <a16:creationId xmlns:a16="http://schemas.microsoft.com/office/drawing/2014/main" id="{5D7B596E-DA3A-4FA1-9260-CE5589845767}"/>
+              </a:ext>
+            </a:extLst>
+          </p:cNvPr>
+          <p:cNvSpPr>
+            <a:spLocks noGrp="1"/>
+          </p:cNvSpPr>
+          <p:nvPr>
+            <p:ph type="sldNum" sz="quarter" idx="12"/>
+          </p:nvPr>
+        </p:nvSpPr>
+        <p:spPr/>
+        <p:txBody>
+          <a:bodyPr/>
+          <a:lstStyle/>
+          <a:p>
+            <a:fld id="{B28E8911-E3D6-4AD9-AA24-3D7604D2F44D}" type="slidenum">
+              <a:rPr lang="ru-RU" smtClean="0"/>
+              <a:t>20</a:t>
+            </a:fld>
+            <a:endParaRPr lang="ru-RU"/>
+          </a:p>
+        </p:txBody>
+      </p:sp>
+    </p:spTree>
+    <p:extLst>
+      <p:ext uri="{BB962C8B-B14F-4D97-AF65-F5344CB8AC3E}">
+        <p14:creationId xmlns:p14="http://schemas.microsoft.com/office/powerpoint/2010/main" val="640609002"/>
+      </p:ext>
+    </p:extLst>
+  </p:cSld>
+  <p:clrMapOvr>
+    <a:masterClrMapping/>
+  </p:clrMapOvr>
+</p:sld>
+</file>
+
+<file path=ppt/slides/slide21.xml><?xml version="1.0" encoding="utf-8"?>
+<p:sld xmlns:a="http://schemas.openxmlformats.org/drawingml/2006/main" xmlns:r="http://schemas.openxmlformats.org/officeDocument/2006/relationships" xmlns:p="http://schemas.openxmlformats.org/presentationml/2006/main">
+  <p:cSld>
+    <p:spTree>
+      <p:nvGrpSpPr>
+        <p:cNvPr id="1" name=""/>
+        <p:cNvGrpSpPr/>
+        <p:nvPr/>
+      </p:nvGrpSpPr>
+      <p:grpSpPr>
+        <a:xfrm>
+          <a:off x="0" y="0"/>
+          <a:ext cx="0" cy="0"/>
+          <a:chOff x="0" y="0"/>
+          <a:chExt cx="0" cy="0"/>
+        </a:xfrm>
+      </p:grpSpPr>
+      <p:sp>
+        <p:nvSpPr>
+          <p:cNvPr id="3" name="Title 2">
+            <a:extLst>
+              <a:ext uri="{FF2B5EF4-FFF2-40B4-BE49-F238E27FC236}">
+                <a16:creationId xmlns:a16="http://schemas.microsoft.com/office/drawing/2014/main" id="{AD20A85F-E557-4665-A30A-B0D4CCF0920F}"/>
+              </a:ext>
+            </a:extLst>
+          </p:cNvPr>
+          <p:cNvSpPr>
+            <a:spLocks noGrp="1"/>
+          </p:cNvSpPr>
+          <p:nvPr>
+            <p:ph type="title"/>
+          </p:nvPr>
+        </p:nvSpPr>
+        <p:spPr/>
+        <p:txBody>
+          <a:bodyPr/>
+          <a:lstStyle/>
+          <a:p>
+            <a:r>
+              <a:rPr lang="ru-RU" dirty="0"/>
+              <a:t>Реализация интерфейса</a:t>
+            </a:r>
+          </a:p>
+        </p:txBody>
+      </p:sp>
+      <p:sp>
+        <p:nvSpPr>
+          <p:cNvPr id="4" name="Text Placeholder 3">
+            <a:extLst>
+              <a:ext uri="{FF2B5EF4-FFF2-40B4-BE49-F238E27FC236}">
+                <a16:creationId xmlns:a16="http://schemas.microsoft.com/office/drawing/2014/main" id="{A14DD752-76D8-4068-A767-76069DC8340B}"/>
+              </a:ext>
+            </a:extLst>
+          </p:cNvPr>
+          <p:cNvSpPr>
+            <a:spLocks noGrp="1"/>
+          </p:cNvSpPr>
+          <p:nvPr>
+            <p:ph type="body" idx="1"/>
+          </p:nvPr>
+        </p:nvSpPr>
+        <p:spPr/>
+        <p:txBody>
+          <a:bodyPr/>
+          <a:lstStyle/>
+          <a:p>
+            <a:endParaRPr lang="ru-RU"/>
+          </a:p>
+        </p:txBody>
+      </p:sp>
+      <p:sp>
+        <p:nvSpPr>
+          <p:cNvPr id="2" name="Slide Number Placeholder 1">
+            <a:extLst>
+              <a:ext uri="{FF2B5EF4-FFF2-40B4-BE49-F238E27FC236}">
+                <a16:creationId xmlns:a16="http://schemas.microsoft.com/office/drawing/2014/main" id="{F467DA6F-952A-418D-A83A-62E966CBBEA3}"/>
+              </a:ext>
+            </a:extLst>
+          </p:cNvPr>
+          <p:cNvSpPr>
+            <a:spLocks noGrp="1"/>
+          </p:cNvSpPr>
+          <p:nvPr>
+            <p:ph type="sldNum" sz="quarter" idx="12"/>
+          </p:nvPr>
+        </p:nvSpPr>
+        <p:spPr/>
+        <p:txBody>
+          <a:bodyPr/>
+          <a:lstStyle/>
+          <a:p>
+            <a:fld id="{B28E8911-E3D6-4AD9-AA24-3D7604D2F44D}" type="slidenum">
+              <a:rPr lang="ru-RU" smtClean="0"/>
+              <a:t>21</a:t>
+            </a:fld>
+            <a:endParaRPr lang="ru-RU"/>
+          </a:p>
+        </p:txBody>
+      </p:sp>
+    </p:spTree>
+    <p:extLst>
+      <p:ext uri="{BB962C8B-B14F-4D97-AF65-F5344CB8AC3E}">
+        <p14:creationId xmlns:p14="http://schemas.microsoft.com/office/powerpoint/2010/main" val="2367856906"/>
+      </p:ext>
+    </p:extLst>
+  </p:cSld>
+  <p:clrMapOvr>
+    <a:masterClrMapping/>
+  </p:clrMapOvr>
+</p:sld>
+</file>
+
+<file path=ppt/slides/slide22.xml><?xml version="1.0" encoding="utf-8"?>
+<p:sld xmlns:a="http://schemas.openxmlformats.org/drawingml/2006/main" xmlns:r="http://schemas.openxmlformats.org/officeDocument/2006/relationships" xmlns:p="http://schemas.openxmlformats.org/presentationml/2006/main">
+  <p:cSld>
+    <p:spTree>
+      <p:nvGrpSpPr>
+        <p:cNvPr id="1" name=""/>
+        <p:cNvGrpSpPr/>
+        <p:nvPr/>
+      </p:nvGrpSpPr>
+      <p:grpSpPr>
+        <a:xfrm>
+          <a:off x="0" y="0"/>
+          <a:ext cx="0" cy="0"/>
+          <a:chOff x="0" y="0"/>
+          <a:chExt cx="0" cy="0"/>
+        </a:xfrm>
+      </p:grpSpPr>
+      <p:sp>
+        <p:nvSpPr>
+          <p:cNvPr id="2" name="Title 1">
+            <a:extLst>
+              <a:ext uri="{FF2B5EF4-FFF2-40B4-BE49-F238E27FC236}">
+                <a16:creationId xmlns:a16="http://schemas.microsoft.com/office/drawing/2014/main" id="{CBF18DEB-8DC1-40F2-8D25-8A130A9D752D}"/>
+              </a:ext>
+            </a:extLst>
+          </p:cNvPr>
+          <p:cNvSpPr>
+            <a:spLocks noGrp="1"/>
+          </p:cNvSpPr>
+          <p:nvPr>
+            <p:ph type="title"/>
+          </p:nvPr>
+        </p:nvSpPr>
+        <p:spPr/>
+        <p:txBody>
+          <a:bodyPr/>
+          <a:lstStyle/>
+          <a:p>
+            <a:r>
+              <a:rPr lang="ru-RU" dirty="0"/>
+              <a:t>Обозначение на диаграмме</a:t>
+            </a:r>
+          </a:p>
+        </p:txBody>
+      </p:sp>
+      <p:pic>
+        <p:nvPicPr>
+          <p:cNvPr id="5" name="Объект 4">
+            <a:extLst>
+              <a:ext uri="{FF2B5EF4-FFF2-40B4-BE49-F238E27FC236}">
+                <a16:creationId xmlns:a16="http://schemas.microsoft.com/office/drawing/2014/main" id="{29A911D7-AE2A-44B4-89C9-8741FF9005E8}"/>
+              </a:ext>
+            </a:extLst>
+          </p:cNvPr>
+          <p:cNvPicPr>
+            <a:picLocks noChangeAspect="1"/>
+          </p:cNvPicPr>
+          <p:nvPr/>
+        </p:nvPicPr>
+        <p:blipFill>
+          <a:blip r:embed="rId2">
+            <a:extLst>
+              <a:ext uri="{28A0092B-C50C-407E-A947-70E740481C1C}">
+                <a14:useLocalDpi xmlns:a14="http://schemas.microsoft.com/office/drawing/2010/main" val="0"/>
+              </a:ext>
+            </a:extLst>
+          </a:blip>
+          <a:stretch>
+            <a:fillRect/>
+          </a:stretch>
+        </p:blipFill>
+        <p:spPr>
+          <a:xfrm>
+            <a:off x="4984716" y="1690687"/>
+            <a:ext cx="3379028" cy="4943393"/>
+          </a:xfrm>
+          <a:prstGeom prst="rect">
+            <a:avLst/>
+          </a:prstGeom>
+        </p:spPr>
+      </p:pic>
+      <p:sp>
+        <p:nvSpPr>
+          <p:cNvPr id="6" name="Slide Number Placeholder 5">
+            <a:extLst>
+              <a:ext uri="{FF2B5EF4-FFF2-40B4-BE49-F238E27FC236}">
+                <a16:creationId xmlns:a16="http://schemas.microsoft.com/office/drawing/2014/main" id="{B320C541-292C-44F4-8485-CDBDEAE9DAC5}"/>
+              </a:ext>
+            </a:extLst>
+          </p:cNvPr>
+          <p:cNvSpPr>
+            <a:spLocks noGrp="1"/>
+          </p:cNvSpPr>
+          <p:nvPr>
+            <p:ph type="sldNum" sz="quarter" idx="12"/>
+          </p:nvPr>
+        </p:nvSpPr>
+        <p:spPr/>
+        <p:txBody>
+          <a:bodyPr/>
+          <a:lstStyle/>
+          <a:p>
+            <a:fld id="{B28E8911-E3D6-4AD9-AA24-3D7604D2F44D}" type="slidenum">
+              <a:rPr lang="ru-RU" smtClean="0"/>
+              <a:t>22</a:t>
+            </a:fld>
+            <a:endParaRPr lang="ru-RU"/>
+          </a:p>
+        </p:txBody>
+      </p:sp>
+    </p:spTree>
+    <p:extLst>
+      <p:ext uri="{BB962C8B-B14F-4D97-AF65-F5344CB8AC3E}">
+        <p14:creationId xmlns:p14="http://schemas.microsoft.com/office/powerpoint/2010/main" val="241955883"/>
+      </p:ext>
+    </p:extLst>
+  </p:cSld>
+  <p:clrMapOvr>
+    <a:masterClrMapping/>
+  </p:clrMapOvr>
+</p:sld>
+</file>
+
+<file path=ppt/slides/slide3.xml><?xml version="1.0" encoding="utf-8"?>
+<p:sld xmlns:a="http://schemas.openxmlformats.org/drawingml/2006/main" xmlns:r="http://schemas.openxmlformats.org/officeDocument/2006/relationships" xmlns:p="http://schemas.openxmlformats.org/presentationml/2006/main">
+  <p:cSld>
+    <p:spTree>
+      <p:nvGrpSpPr>
+        <p:cNvPr id="1" name=""/>
+        <p:cNvGrpSpPr/>
+        <p:nvPr/>
+      </p:nvGrpSpPr>
+      <p:grpSpPr>
+        <a:xfrm>
+          <a:off x="0" y="0"/>
+          <a:ext cx="0" cy="0"/>
+          <a:chOff x="0" y="0"/>
+          <a:chExt cx="0" cy="0"/>
+        </a:xfrm>
+      </p:grpSpPr>
       <p:sp>
         <p:nvSpPr>
           <p:cNvPr id="2" name="Заголовок 1">
@@ -10641,7 +10334,7 @@
 </p:sld>
 </file>
 
-<file path=ppt/slides/slide5.xml><?xml version="1.0" encoding="utf-8"?>
+<file path=ppt/slides/slide4.xml><?xml version="1.0" encoding="utf-8"?>
 <p:sld xmlns:a="http://schemas.openxmlformats.org/drawingml/2006/main" xmlns:r="http://schemas.openxmlformats.org/officeDocument/2006/relationships" xmlns:p="http://schemas.openxmlformats.org/presentationml/2006/main">
   <p:cSld>
     <p:spTree>
@@ -11155,6 +10848,730 @@
 </p:sld>
 </file>
 
+<file path=ppt/slides/slide5.xml><?xml version="1.0" encoding="utf-8"?>
+<p:sld xmlns:a="http://schemas.openxmlformats.org/drawingml/2006/main" xmlns:r="http://schemas.openxmlformats.org/officeDocument/2006/relationships" xmlns:p="http://schemas.openxmlformats.org/presentationml/2006/main">
+  <p:cSld>
+    <p:spTree>
+      <p:nvGrpSpPr>
+        <p:cNvPr id="1" name=""/>
+        <p:cNvGrpSpPr/>
+        <p:nvPr/>
+      </p:nvGrpSpPr>
+      <p:grpSpPr>
+        <a:xfrm>
+          <a:off x="0" y="0"/>
+          <a:ext cx="0" cy="0"/>
+          <a:chOff x="0" y="0"/>
+          <a:chExt cx="0" cy="0"/>
+        </a:xfrm>
+      </p:grpSpPr>
+      <p:sp>
+        <p:nvSpPr>
+          <p:cNvPr id="2" name="Заголовок 1">
+            <a:extLst>
+              <a:ext uri="{FF2B5EF4-FFF2-40B4-BE49-F238E27FC236}">
+                <a16:creationId xmlns:a16="http://schemas.microsoft.com/office/drawing/2014/main" id="{3F7EDF0C-5F6E-4497-A839-4FCA94CDB171}"/>
+              </a:ext>
+            </a:extLst>
+          </p:cNvPr>
+          <p:cNvSpPr>
+            <a:spLocks noGrp="1"/>
+          </p:cNvSpPr>
+          <p:nvPr>
+            <p:ph type="title"/>
+          </p:nvPr>
+        </p:nvSpPr>
+        <p:spPr/>
+        <p:txBody>
+          <a:bodyPr/>
+          <a:lstStyle/>
+          <a:p>
+            <a:r>
+              <a:rPr lang="ru-RU" dirty="0"/>
+              <a:t>Примеры</a:t>
+            </a:r>
+          </a:p>
+        </p:txBody>
+      </p:sp>
+      <p:sp>
+        <p:nvSpPr>
+          <p:cNvPr id="3" name="Объект 2">
+            <a:extLst>
+              <a:ext uri="{FF2B5EF4-FFF2-40B4-BE49-F238E27FC236}">
+                <a16:creationId xmlns:a16="http://schemas.microsoft.com/office/drawing/2014/main" id="{4F76F067-A745-4012-8CF4-6EB40B0AB0D1}"/>
+              </a:ext>
+            </a:extLst>
+          </p:cNvPr>
+          <p:cNvSpPr>
+            <a:spLocks noGrp="1"/>
+          </p:cNvSpPr>
+          <p:nvPr>
+            <p:ph idx="1"/>
+          </p:nvPr>
+        </p:nvSpPr>
+        <p:spPr>
+          <a:xfrm>
+            <a:off x="838200" y="1825625"/>
+            <a:ext cx="6553944" cy="4351338"/>
+          </a:xfrm>
+        </p:spPr>
+        <p:txBody>
+          <a:bodyPr>
+            <a:normAutofit fontScale="92500"/>
+          </a:bodyPr>
+          <a:lstStyle/>
+          <a:p>
+            <a:r>
+              <a:rPr lang="ru-RU" dirty="0"/>
+              <a:t>Точка на плоскости</a:t>
+            </a:r>
+          </a:p>
+          <a:p>
+            <a:pPr lvl="1"/>
+            <a:r>
+              <a:rPr lang="ru-RU" dirty="0"/>
+              <a:t>Пара чисел, задающих координаты точки</a:t>
+            </a:r>
+          </a:p>
+          <a:p>
+            <a:r>
+              <a:rPr lang="ru-RU" dirty="0"/>
+              <a:t>Окружность</a:t>
+            </a:r>
+          </a:p>
+          <a:p>
+            <a:pPr lvl="1"/>
+            <a:r>
+              <a:rPr lang="ru-RU" dirty="0"/>
+              <a:t>Точка (центр) и число (радиус)</a:t>
+            </a:r>
+          </a:p>
+          <a:p>
+            <a:r>
+              <a:rPr lang="ru-RU" dirty="0"/>
+              <a:t>Класс комплексных чисел</a:t>
+            </a:r>
+          </a:p>
+          <a:p>
+            <a:pPr lvl="1"/>
+            <a:r>
+              <a:rPr lang="ru-RU" dirty="0"/>
+              <a:t>Действительная и мнимая часть</a:t>
+            </a:r>
+            <a:endParaRPr lang="en-US" dirty="0"/>
+          </a:p>
+          <a:p>
+            <a:r>
+              <a:rPr lang="ru-RU" dirty="0"/>
+              <a:t>Класс рациональных чисел</a:t>
+            </a:r>
+          </a:p>
+          <a:p>
+            <a:pPr lvl="1"/>
+            <a:r>
+              <a:rPr lang="ru-RU" dirty="0"/>
+              <a:t>Пара целых чисел - числитель и знаменатель</a:t>
+            </a:r>
+          </a:p>
+          <a:p>
+            <a:r>
+              <a:rPr lang="ru-RU" dirty="0"/>
+              <a:t>Многоугольник</a:t>
+            </a:r>
+          </a:p>
+          <a:p>
+            <a:pPr lvl="1"/>
+            <a:r>
+              <a:rPr lang="ru-RU" dirty="0"/>
+              <a:t>Координаты вершин</a:t>
+            </a:r>
+          </a:p>
+        </p:txBody>
+      </p:sp>
+      <p:sp>
+        <p:nvSpPr>
+          <p:cNvPr id="7" name="TextBox 6">
+            <a:extLst>
+              <a:ext uri="{FF2B5EF4-FFF2-40B4-BE49-F238E27FC236}">
+                <a16:creationId xmlns:a16="http://schemas.microsoft.com/office/drawing/2014/main" id="{0104880E-E7E2-4F8C-80D3-DB6BEC83767B}"/>
+              </a:ext>
+            </a:extLst>
+          </p:cNvPr>
+          <p:cNvSpPr txBox="1"/>
+          <p:nvPr/>
+        </p:nvSpPr>
+        <p:spPr>
+          <a:xfrm>
+            <a:off x="7536160" y="548680"/>
+            <a:ext cx="4557119" cy="6186309"/>
+          </a:xfrm>
+          <a:prstGeom prst="rect">
+            <a:avLst/>
+          </a:prstGeom>
+          <a:noFill/>
+        </p:spPr>
+        <p:txBody>
+          <a:bodyPr wrap="square">
+            <a:spAutoFit/>
+          </a:bodyPr>
+          <a:lstStyle/>
+          <a:p>
+            <a:r>
+              <a:rPr lang="en-US" b="0" dirty="0">
+                <a:solidFill>
+                  <a:srgbClr val="0000FF"/>
+                </a:solidFill>
+                <a:effectLst/>
+                <a:latin typeface="Consolas" panose="020B0609020204030204" pitchFamily="49" charset="0"/>
+              </a:rPr>
+              <a:t>struct</a:t>
+            </a:r>
+            <a:r>
+              <a:rPr lang="en-US" b="0" dirty="0">
+                <a:solidFill>
+                  <a:srgbClr val="000000"/>
+                </a:solidFill>
+                <a:effectLst/>
+                <a:latin typeface="Consolas" panose="020B0609020204030204" pitchFamily="49" charset="0"/>
+              </a:rPr>
+              <a:t> Point {</a:t>
+            </a:r>
+          </a:p>
+          <a:p>
+            <a:r>
+              <a:rPr lang="en-US" b="0" dirty="0">
+                <a:solidFill>
+                  <a:srgbClr val="000000"/>
+                </a:solidFill>
+                <a:effectLst/>
+                <a:latin typeface="Consolas" panose="020B0609020204030204" pitchFamily="49" charset="0"/>
+              </a:rPr>
+              <a:t>    </a:t>
+            </a:r>
+            <a:r>
+              <a:rPr lang="en-US" b="0" dirty="0">
+                <a:solidFill>
+                  <a:srgbClr val="0000FF"/>
+                </a:solidFill>
+                <a:effectLst/>
+                <a:latin typeface="Consolas" panose="020B0609020204030204" pitchFamily="49" charset="0"/>
+              </a:rPr>
+              <a:t>double</a:t>
+            </a:r>
+            <a:r>
+              <a:rPr lang="en-US" b="0" dirty="0">
+                <a:solidFill>
+                  <a:srgbClr val="000000"/>
+                </a:solidFill>
+                <a:effectLst/>
+                <a:latin typeface="Consolas" panose="020B0609020204030204" pitchFamily="49" charset="0"/>
+              </a:rPr>
+              <a:t> x, y;</a:t>
+            </a:r>
+          </a:p>
+          <a:p>
+            <a:r>
+              <a:rPr lang="en-US" b="0" dirty="0">
+                <a:solidFill>
+                  <a:srgbClr val="000000"/>
+                </a:solidFill>
+                <a:effectLst/>
+                <a:latin typeface="Consolas" panose="020B0609020204030204" pitchFamily="49" charset="0"/>
+              </a:rPr>
+              <a:t>};</a:t>
+            </a:r>
+          </a:p>
+          <a:p>
+            <a:br>
+              <a:rPr lang="en-US" b="0" dirty="0">
+                <a:solidFill>
+                  <a:srgbClr val="000000"/>
+                </a:solidFill>
+                <a:effectLst/>
+                <a:latin typeface="Consolas" panose="020B0609020204030204" pitchFamily="49" charset="0"/>
+              </a:rPr>
+            </a:br>
+            <a:r>
+              <a:rPr lang="en-US" b="0" dirty="0">
+                <a:solidFill>
+                  <a:srgbClr val="0000FF"/>
+                </a:solidFill>
+                <a:effectLst/>
+                <a:latin typeface="Consolas" panose="020B0609020204030204" pitchFamily="49" charset="0"/>
+              </a:rPr>
+              <a:t>class</a:t>
+            </a:r>
+            <a:r>
+              <a:rPr lang="en-US" b="0" dirty="0">
+                <a:solidFill>
+                  <a:srgbClr val="000000"/>
+                </a:solidFill>
+                <a:effectLst/>
+                <a:latin typeface="Consolas" panose="020B0609020204030204" pitchFamily="49" charset="0"/>
+              </a:rPr>
+              <a:t> Circle {</a:t>
+            </a:r>
+          </a:p>
+          <a:p>
+            <a:r>
+              <a:rPr lang="en-US" b="0" dirty="0">
+                <a:solidFill>
+                  <a:srgbClr val="000000"/>
+                </a:solidFill>
+                <a:effectLst/>
+                <a:latin typeface="Consolas" panose="020B0609020204030204" pitchFamily="49" charset="0"/>
+              </a:rPr>
+              <a:t>    Point </a:t>
+            </a:r>
+            <a:r>
+              <a:rPr lang="en-US" b="0" dirty="0" err="1">
+                <a:solidFill>
+                  <a:srgbClr val="000000"/>
+                </a:solidFill>
+                <a:effectLst/>
+                <a:latin typeface="Consolas" panose="020B0609020204030204" pitchFamily="49" charset="0"/>
+              </a:rPr>
+              <a:t>m_center</a:t>
+            </a:r>
+            <a:r>
+              <a:rPr lang="en-US" b="0" dirty="0">
+                <a:solidFill>
+                  <a:srgbClr val="000000"/>
+                </a:solidFill>
+                <a:effectLst/>
+                <a:latin typeface="Consolas" panose="020B0609020204030204" pitchFamily="49" charset="0"/>
+              </a:rPr>
+              <a:t>;</a:t>
+            </a:r>
+          </a:p>
+          <a:p>
+            <a:r>
+              <a:rPr lang="en-US" b="0" dirty="0">
+                <a:solidFill>
+                  <a:srgbClr val="000000"/>
+                </a:solidFill>
+                <a:effectLst/>
+                <a:latin typeface="Consolas" panose="020B0609020204030204" pitchFamily="49" charset="0"/>
+              </a:rPr>
+              <a:t>    </a:t>
+            </a:r>
+            <a:r>
+              <a:rPr lang="en-US" b="0" dirty="0">
+                <a:solidFill>
+                  <a:srgbClr val="0000FF"/>
+                </a:solidFill>
+                <a:effectLst/>
+                <a:latin typeface="Consolas" panose="020B0609020204030204" pitchFamily="49" charset="0"/>
+              </a:rPr>
+              <a:t>double</a:t>
+            </a:r>
+            <a:r>
+              <a:rPr lang="en-US" b="0" dirty="0">
+                <a:solidFill>
+                  <a:srgbClr val="000000"/>
+                </a:solidFill>
+                <a:effectLst/>
+                <a:latin typeface="Consolas" panose="020B0609020204030204" pitchFamily="49" charset="0"/>
+              </a:rPr>
+              <a:t> </a:t>
+            </a:r>
+            <a:r>
+              <a:rPr lang="en-US" b="0" dirty="0" err="1">
+                <a:solidFill>
+                  <a:srgbClr val="000000"/>
+                </a:solidFill>
+                <a:effectLst/>
+                <a:latin typeface="Consolas" panose="020B0609020204030204" pitchFamily="49" charset="0"/>
+              </a:rPr>
+              <a:t>m_radius</a:t>
+            </a:r>
+            <a:r>
+              <a:rPr lang="en-US" b="0" dirty="0">
+                <a:solidFill>
+                  <a:srgbClr val="000000"/>
+                </a:solidFill>
+                <a:effectLst/>
+                <a:latin typeface="Consolas" panose="020B0609020204030204" pitchFamily="49" charset="0"/>
+              </a:rPr>
+              <a:t>;</a:t>
+            </a:r>
+          </a:p>
+          <a:p>
+            <a:r>
+              <a:rPr lang="en-US" b="0" dirty="0">
+                <a:solidFill>
+                  <a:srgbClr val="000000"/>
+                </a:solidFill>
+                <a:effectLst/>
+                <a:latin typeface="Consolas" panose="020B0609020204030204" pitchFamily="49" charset="0"/>
+              </a:rPr>
+              <a:t>};</a:t>
+            </a:r>
+          </a:p>
+          <a:p>
+            <a:br>
+              <a:rPr lang="en-US" b="0" dirty="0">
+                <a:solidFill>
+                  <a:srgbClr val="000000"/>
+                </a:solidFill>
+                <a:effectLst/>
+                <a:latin typeface="Consolas" panose="020B0609020204030204" pitchFamily="49" charset="0"/>
+              </a:rPr>
+            </a:br>
+            <a:r>
+              <a:rPr lang="en-US" b="0" dirty="0">
+                <a:solidFill>
+                  <a:srgbClr val="0000FF"/>
+                </a:solidFill>
+                <a:effectLst/>
+                <a:latin typeface="Consolas" panose="020B0609020204030204" pitchFamily="49" charset="0"/>
+              </a:rPr>
+              <a:t>struct</a:t>
+            </a:r>
+            <a:r>
+              <a:rPr lang="en-US" b="0" dirty="0">
+                <a:solidFill>
+                  <a:srgbClr val="000000"/>
+                </a:solidFill>
+                <a:effectLst/>
+                <a:latin typeface="Consolas" panose="020B0609020204030204" pitchFamily="49" charset="0"/>
+              </a:rPr>
+              <a:t> Complex {</a:t>
+            </a:r>
+          </a:p>
+          <a:p>
+            <a:r>
+              <a:rPr lang="en-US" b="0" dirty="0">
+                <a:solidFill>
+                  <a:srgbClr val="000000"/>
+                </a:solidFill>
+                <a:effectLst/>
+                <a:latin typeface="Consolas" panose="020B0609020204030204" pitchFamily="49" charset="0"/>
+              </a:rPr>
+              <a:t>    </a:t>
+            </a:r>
+            <a:r>
+              <a:rPr lang="en-US" b="0" dirty="0">
+                <a:solidFill>
+                  <a:srgbClr val="0000FF"/>
+                </a:solidFill>
+                <a:effectLst/>
+                <a:latin typeface="Consolas" panose="020B0609020204030204" pitchFamily="49" charset="0"/>
+              </a:rPr>
+              <a:t>double</a:t>
+            </a:r>
+            <a:r>
+              <a:rPr lang="en-US" b="0" dirty="0">
+                <a:solidFill>
+                  <a:srgbClr val="000000"/>
+                </a:solidFill>
+                <a:effectLst/>
+                <a:latin typeface="Consolas" panose="020B0609020204030204" pitchFamily="49" charset="0"/>
+              </a:rPr>
+              <a:t> real;</a:t>
+            </a:r>
+          </a:p>
+          <a:p>
+            <a:r>
+              <a:rPr lang="en-US" b="0" dirty="0">
+                <a:solidFill>
+                  <a:srgbClr val="000000"/>
+                </a:solidFill>
+                <a:effectLst/>
+                <a:latin typeface="Consolas" panose="020B0609020204030204" pitchFamily="49" charset="0"/>
+              </a:rPr>
+              <a:t>    </a:t>
+            </a:r>
+            <a:r>
+              <a:rPr lang="en-US" b="0" dirty="0">
+                <a:solidFill>
+                  <a:srgbClr val="0000FF"/>
+                </a:solidFill>
+                <a:effectLst/>
+                <a:latin typeface="Consolas" panose="020B0609020204030204" pitchFamily="49" charset="0"/>
+              </a:rPr>
+              <a:t>double</a:t>
+            </a:r>
+            <a:r>
+              <a:rPr lang="en-US" b="0" dirty="0">
+                <a:solidFill>
+                  <a:srgbClr val="000000"/>
+                </a:solidFill>
+                <a:effectLst/>
+                <a:latin typeface="Consolas" panose="020B0609020204030204" pitchFamily="49" charset="0"/>
+              </a:rPr>
+              <a:t> </a:t>
+            </a:r>
+            <a:r>
+              <a:rPr lang="en-US" b="0" dirty="0" err="1">
+                <a:solidFill>
+                  <a:srgbClr val="000000"/>
+                </a:solidFill>
+                <a:effectLst/>
+                <a:latin typeface="Consolas" panose="020B0609020204030204" pitchFamily="49" charset="0"/>
+              </a:rPr>
+              <a:t>im</a:t>
+            </a:r>
+            <a:r>
+              <a:rPr lang="en-US" b="0" dirty="0">
+                <a:solidFill>
+                  <a:srgbClr val="000000"/>
+                </a:solidFill>
+                <a:effectLst/>
+                <a:latin typeface="Consolas" panose="020B0609020204030204" pitchFamily="49" charset="0"/>
+              </a:rPr>
+              <a:t>;</a:t>
+            </a:r>
+          </a:p>
+          <a:p>
+            <a:r>
+              <a:rPr lang="en-US" b="0" dirty="0">
+                <a:solidFill>
+                  <a:srgbClr val="000000"/>
+                </a:solidFill>
+                <a:effectLst/>
+                <a:latin typeface="Consolas" panose="020B0609020204030204" pitchFamily="49" charset="0"/>
+              </a:rPr>
+              <a:t>};</a:t>
+            </a:r>
+          </a:p>
+          <a:p>
+            <a:br>
+              <a:rPr lang="en-US" b="0" dirty="0">
+                <a:solidFill>
+                  <a:srgbClr val="000000"/>
+                </a:solidFill>
+                <a:effectLst/>
+                <a:latin typeface="Consolas" panose="020B0609020204030204" pitchFamily="49" charset="0"/>
+              </a:rPr>
+            </a:br>
+            <a:r>
+              <a:rPr lang="en-US" b="0" dirty="0">
+                <a:solidFill>
+                  <a:srgbClr val="0000FF"/>
+                </a:solidFill>
+                <a:effectLst/>
+                <a:latin typeface="Consolas" panose="020B0609020204030204" pitchFamily="49" charset="0"/>
+              </a:rPr>
+              <a:t>class</a:t>
+            </a:r>
+            <a:r>
+              <a:rPr lang="en-US" b="0" dirty="0">
+                <a:solidFill>
+                  <a:srgbClr val="000000"/>
+                </a:solidFill>
+                <a:effectLst/>
+                <a:latin typeface="Consolas" panose="020B0609020204030204" pitchFamily="49" charset="0"/>
+              </a:rPr>
+              <a:t> Rational {</a:t>
+            </a:r>
+          </a:p>
+          <a:p>
+            <a:r>
+              <a:rPr lang="en-US" b="0" dirty="0">
+                <a:solidFill>
+                  <a:srgbClr val="000000"/>
+                </a:solidFill>
+                <a:effectLst/>
+                <a:latin typeface="Consolas" panose="020B0609020204030204" pitchFamily="49" charset="0"/>
+              </a:rPr>
+              <a:t>    </a:t>
+            </a:r>
+            <a:r>
+              <a:rPr lang="en-US" b="0" dirty="0">
+                <a:solidFill>
+                  <a:srgbClr val="0000FF"/>
+                </a:solidFill>
+                <a:effectLst/>
+                <a:latin typeface="Consolas" panose="020B0609020204030204" pitchFamily="49" charset="0"/>
+              </a:rPr>
+              <a:t>int</a:t>
+            </a:r>
+            <a:r>
+              <a:rPr lang="en-US" b="0" dirty="0">
+                <a:solidFill>
+                  <a:srgbClr val="000000"/>
+                </a:solidFill>
+                <a:effectLst/>
+                <a:latin typeface="Consolas" panose="020B0609020204030204" pitchFamily="49" charset="0"/>
+              </a:rPr>
+              <a:t> </a:t>
+            </a:r>
+            <a:r>
+              <a:rPr lang="en-US" b="0" dirty="0" err="1">
+                <a:solidFill>
+                  <a:srgbClr val="000000"/>
+                </a:solidFill>
+                <a:effectLst/>
+                <a:latin typeface="Consolas" panose="020B0609020204030204" pitchFamily="49" charset="0"/>
+              </a:rPr>
+              <a:t>m_numerator</a:t>
+            </a:r>
+            <a:r>
+              <a:rPr lang="en-US" b="0" dirty="0">
+                <a:solidFill>
+                  <a:srgbClr val="000000"/>
+                </a:solidFill>
+                <a:effectLst/>
+                <a:latin typeface="Consolas" panose="020B0609020204030204" pitchFamily="49" charset="0"/>
+              </a:rPr>
+              <a:t>;</a:t>
+            </a:r>
+          </a:p>
+          <a:p>
+            <a:r>
+              <a:rPr lang="en-US" b="0" dirty="0">
+                <a:solidFill>
+                  <a:srgbClr val="000000"/>
+                </a:solidFill>
+                <a:effectLst/>
+                <a:latin typeface="Consolas" panose="020B0609020204030204" pitchFamily="49" charset="0"/>
+              </a:rPr>
+              <a:t>    </a:t>
+            </a:r>
+            <a:r>
+              <a:rPr lang="en-US" b="0" dirty="0">
+                <a:solidFill>
+                  <a:srgbClr val="0000FF"/>
+                </a:solidFill>
+                <a:effectLst/>
+                <a:latin typeface="Consolas" panose="020B0609020204030204" pitchFamily="49" charset="0"/>
+              </a:rPr>
+              <a:t>int</a:t>
+            </a:r>
+            <a:r>
+              <a:rPr lang="en-US" b="0" dirty="0">
+                <a:solidFill>
+                  <a:srgbClr val="000000"/>
+                </a:solidFill>
+                <a:effectLst/>
+                <a:latin typeface="Consolas" panose="020B0609020204030204" pitchFamily="49" charset="0"/>
+              </a:rPr>
+              <a:t> </a:t>
+            </a:r>
+            <a:r>
+              <a:rPr lang="en-US" b="0" dirty="0" err="1">
+                <a:solidFill>
+                  <a:srgbClr val="000000"/>
+                </a:solidFill>
+                <a:effectLst/>
+                <a:latin typeface="Consolas" panose="020B0609020204030204" pitchFamily="49" charset="0"/>
+              </a:rPr>
+              <a:t>m_denominator</a:t>
+            </a:r>
+            <a:r>
+              <a:rPr lang="en-US" b="0" dirty="0">
+                <a:solidFill>
+                  <a:srgbClr val="000000"/>
+                </a:solidFill>
+                <a:effectLst/>
+                <a:latin typeface="Consolas" panose="020B0609020204030204" pitchFamily="49" charset="0"/>
+              </a:rPr>
+              <a:t>;</a:t>
+            </a:r>
+          </a:p>
+          <a:p>
+            <a:r>
+              <a:rPr lang="en-US" b="0" dirty="0">
+                <a:solidFill>
+                  <a:srgbClr val="000000"/>
+                </a:solidFill>
+                <a:effectLst/>
+                <a:latin typeface="Consolas" panose="020B0609020204030204" pitchFamily="49" charset="0"/>
+              </a:rPr>
+              <a:t>};</a:t>
+            </a:r>
+          </a:p>
+          <a:p>
+            <a:br>
+              <a:rPr lang="en-US" b="0" dirty="0">
+                <a:solidFill>
+                  <a:srgbClr val="000000"/>
+                </a:solidFill>
+                <a:effectLst/>
+                <a:latin typeface="Consolas" panose="020B0609020204030204" pitchFamily="49" charset="0"/>
+              </a:rPr>
+            </a:br>
+            <a:r>
+              <a:rPr lang="en-US" b="0" dirty="0">
+                <a:solidFill>
+                  <a:srgbClr val="0000FF"/>
+                </a:solidFill>
+                <a:effectLst/>
+                <a:latin typeface="Consolas" panose="020B0609020204030204" pitchFamily="49" charset="0"/>
+              </a:rPr>
+              <a:t>class</a:t>
+            </a:r>
+            <a:r>
+              <a:rPr lang="en-US" b="0" dirty="0">
+                <a:solidFill>
+                  <a:srgbClr val="000000"/>
+                </a:solidFill>
+                <a:effectLst/>
+                <a:latin typeface="Consolas" panose="020B0609020204030204" pitchFamily="49" charset="0"/>
+              </a:rPr>
+              <a:t> Polygon {</a:t>
+            </a:r>
+          </a:p>
+          <a:p>
+            <a:r>
+              <a:rPr lang="en-US" b="0" dirty="0">
+                <a:solidFill>
+                  <a:srgbClr val="000000"/>
+                </a:solidFill>
+                <a:effectLst/>
+                <a:latin typeface="Consolas" panose="020B0609020204030204" pitchFamily="49" charset="0"/>
+              </a:rPr>
+              <a:t>    std::vector&lt;Point&gt; </a:t>
+            </a:r>
+            <a:r>
+              <a:rPr lang="en-US" b="0" dirty="0" err="1">
+                <a:solidFill>
+                  <a:srgbClr val="000000"/>
+                </a:solidFill>
+                <a:effectLst/>
+                <a:latin typeface="Consolas" panose="020B0609020204030204" pitchFamily="49" charset="0"/>
+              </a:rPr>
+              <a:t>m_vertices</a:t>
+            </a:r>
+            <a:r>
+              <a:rPr lang="en-US" b="0" dirty="0">
+                <a:solidFill>
+                  <a:srgbClr val="000000"/>
+                </a:solidFill>
+                <a:effectLst/>
+                <a:latin typeface="Consolas" panose="020B0609020204030204" pitchFamily="49" charset="0"/>
+              </a:rPr>
+              <a:t>;</a:t>
+            </a:r>
+          </a:p>
+          <a:p>
+            <a:r>
+              <a:rPr lang="en-US" b="0" dirty="0">
+                <a:solidFill>
+                  <a:srgbClr val="000000"/>
+                </a:solidFill>
+                <a:effectLst/>
+                <a:latin typeface="Consolas" panose="020B0609020204030204" pitchFamily="49" charset="0"/>
+              </a:rPr>
+              <a:t>};</a:t>
+            </a:r>
+          </a:p>
+        </p:txBody>
+      </p:sp>
+    </p:spTree>
+    <p:extLst>
+      <p:ext uri="{BB962C8B-B14F-4D97-AF65-F5344CB8AC3E}">
+        <p14:creationId xmlns:p14="http://schemas.microsoft.com/office/powerpoint/2010/main" val="3886857560"/>
+      </p:ext>
+    </p:extLst>
+  </p:cSld>
+  <p:clrMapOvr>
+    <a:masterClrMapping/>
+  </p:clrMapOvr>
+</p:sld>
+</file>
+
 <file path=ppt/slides/slide6.xml><?xml version="1.0" encoding="utf-8"?>
 <p:sld xmlns:a="http://schemas.openxmlformats.org/drawingml/2006/main" xmlns:r="http://schemas.openxmlformats.org/officeDocument/2006/relationships" xmlns:p="http://schemas.openxmlformats.org/presentationml/2006/main">
   <p:cSld>
@@ -11174,730 +11591,6 @@
       </p:grpSpPr>
       <p:sp>
         <p:nvSpPr>
-          <p:cNvPr id="2" name="Заголовок 1">
-            <a:extLst>
-              <a:ext uri="{FF2B5EF4-FFF2-40B4-BE49-F238E27FC236}">
-                <a16:creationId xmlns:a16="http://schemas.microsoft.com/office/drawing/2014/main" id="{3F7EDF0C-5F6E-4497-A839-4FCA94CDB171}"/>
-              </a:ext>
-            </a:extLst>
-          </p:cNvPr>
-          <p:cNvSpPr>
-            <a:spLocks noGrp="1"/>
-          </p:cNvSpPr>
-          <p:nvPr>
-            <p:ph type="title"/>
-          </p:nvPr>
-        </p:nvSpPr>
-        <p:spPr/>
-        <p:txBody>
-          <a:bodyPr/>
-          <a:lstStyle/>
-          <a:p>
-            <a:r>
-              <a:rPr lang="ru-RU" dirty="0"/>
-              <a:t>Примеры</a:t>
-            </a:r>
-          </a:p>
-        </p:txBody>
-      </p:sp>
-      <p:sp>
-        <p:nvSpPr>
-          <p:cNvPr id="3" name="Объект 2">
-            <a:extLst>
-              <a:ext uri="{FF2B5EF4-FFF2-40B4-BE49-F238E27FC236}">
-                <a16:creationId xmlns:a16="http://schemas.microsoft.com/office/drawing/2014/main" id="{4F76F067-A745-4012-8CF4-6EB40B0AB0D1}"/>
-              </a:ext>
-            </a:extLst>
-          </p:cNvPr>
-          <p:cNvSpPr>
-            <a:spLocks noGrp="1"/>
-          </p:cNvSpPr>
-          <p:nvPr>
-            <p:ph idx="1"/>
-          </p:nvPr>
-        </p:nvSpPr>
-        <p:spPr>
-          <a:xfrm>
-            <a:off x="838200" y="1825625"/>
-            <a:ext cx="6553944" cy="4351338"/>
-          </a:xfrm>
-        </p:spPr>
-        <p:txBody>
-          <a:bodyPr>
-            <a:normAutofit fontScale="92500"/>
-          </a:bodyPr>
-          <a:lstStyle/>
-          <a:p>
-            <a:r>
-              <a:rPr lang="ru-RU" dirty="0"/>
-              <a:t>Точка на плоскости</a:t>
-            </a:r>
-          </a:p>
-          <a:p>
-            <a:pPr lvl="1"/>
-            <a:r>
-              <a:rPr lang="ru-RU" dirty="0"/>
-              <a:t>Пара чисел, задающих координаты точки</a:t>
-            </a:r>
-          </a:p>
-          <a:p>
-            <a:r>
-              <a:rPr lang="ru-RU" dirty="0"/>
-              <a:t>Окружность</a:t>
-            </a:r>
-          </a:p>
-          <a:p>
-            <a:pPr lvl="1"/>
-            <a:r>
-              <a:rPr lang="ru-RU" dirty="0"/>
-              <a:t>Точка (центр) и число (радиус)</a:t>
-            </a:r>
-          </a:p>
-          <a:p>
-            <a:r>
-              <a:rPr lang="ru-RU" dirty="0"/>
-              <a:t>Класс комплексных чисел</a:t>
-            </a:r>
-          </a:p>
-          <a:p>
-            <a:pPr lvl="1"/>
-            <a:r>
-              <a:rPr lang="ru-RU" dirty="0"/>
-              <a:t>Действительная и мнимая часть</a:t>
-            </a:r>
-            <a:endParaRPr lang="en-US" dirty="0"/>
-          </a:p>
-          <a:p>
-            <a:r>
-              <a:rPr lang="ru-RU" dirty="0"/>
-              <a:t>Класс рациональных чисел</a:t>
-            </a:r>
-          </a:p>
-          <a:p>
-            <a:pPr lvl="1"/>
-            <a:r>
-              <a:rPr lang="ru-RU" dirty="0"/>
-              <a:t>Пара целых чисел - числитель и знаменатель</a:t>
-            </a:r>
-          </a:p>
-          <a:p>
-            <a:r>
-              <a:rPr lang="ru-RU" dirty="0"/>
-              <a:t>Многоугольник</a:t>
-            </a:r>
-          </a:p>
-          <a:p>
-            <a:pPr lvl="1"/>
-            <a:r>
-              <a:rPr lang="ru-RU" dirty="0"/>
-              <a:t>Координаты вершин</a:t>
-            </a:r>
-          </a:p>
-        </p:txBody>
-      </p:sp>
-      <p:sp>
-        <p:nvSpPr>
-          <p:cNvPr id="7" name="TextBox 6">
-            <a:extLst>
-              <a:ext uri="{FF2B5EF4-FFF2-40B4-BE49-F238E27FC236}">
-                <a16:creationId xmlns:a16="http://schemas.microsoft.com/office/drawing/2014/main" id="{0104880E-E7E2-4F8C-80D3-DB6BEC83767B}"/>
-              </a:ext>
-            </a:extLst>
-          </p:cNvPr>
-          <p:cNvSpPr txBox="1"/>
-          <p:nvPr/>
-        </p:nvSpPr>
-        <p:spPr>
-          <a:xfrm>
-            <a:off x="7536160" y="548680"/>
-            <a:ext cx="4557119" cy="6186309"/>
-          </a:xfrm>
-          <a:prstGeom prst="rect">
-            <a:avLst/>
-          </a:prstGeom>
-          <a:noFill/>
-        </p:spPr>
-        <p:txBody>
-          <a:bodyPr wrap="square">
-            <a:spAutoFit/>
-          </a:bodyPr>
-          <a:lstStyle/>
-          <a:p>
-            <a:r>
-              <a:rPr lang="en-US" b="0" dirty="0">
-                <a:solidFill>
-                  <a:srgbClr val="0000FF"/>
-                </a:solidFill>
-                <a:effectLst/>
-                <a:latin typeface="Consolas" panose="020B0609020204030204" pitchFamily="49" charset="0"/>
-              </a:rPr>
-              <a:t>struct</a:t>
-            </a:r>
-            <a:r>
-              <a:rPr lang="en-US" b="0" dirty="0">
-                <a:solidFill>
-                  <a:srgbClr val="000000"/>
-                </a:solidFill>
-                <a:effectLst/>
-                <a:latin typeface="Consolas" panose="020B0609020204030204" pitchFamily="49" charset="0"/>
-              </a:rPr>
-              <a:t> Point {</a:t>
-            </a:r>
-          </a:p>
-          <a:p>
-            <a:r>
-              <a:rPr lang="en-US" b="0" dirty="0">
-                <a:solidFill>
-                  <a:srgbClr val="000000"/>
-                </a:solidFill>
-                <a:effectLst/>
-                <a:latin typeface="Consolas" panose="020B0609020204030204" pitchFamily="49" charset="0"/>
-              </a:rPr>
-              <a:t>    </a:t>
-            </a:r>
-            <a:r>
-              <a:rPr lang="en-US" b="0" dirty="0">
-                <a:solidFill>
-                  <a:srgbClr val="0000FF"/>
-                </a:solidFill>
-                <a:effectLst/>
-                <a:latin typeface="Consolas" panose="020B0609020204030204" pitchFamily="49" charset="0"/>
-              </a:rPr>
-              <a:t>double</a:t>
-            </a:r>
-            <a:r>
-              <a:rPr lang="en-US" b="0" dirty="0">
-                <a:solidFill>
-                  <a:srgbClr val="000000"/>
-                </a:solidFill>
-                <a:effectLst/>
-                <a:latin typeface="Consolas" panose="020B0609020204030204" pitchFamily="49" charset="0"/>
-              </a:rPr>
-              <a:t> x, y;</a:t>
-            </a:r>
-          </a:p>
-          <a:p>
-            <a:r>
-              <a:rPr lang="en-US" b="0" dirty="0">
-                <a:solidFill>
-                  <a:srgbClr val="000000"/>
-                </a:solidFill>
-                <a:effectLst/>
-                <a:latin typeface="Consolas" panose="020B0609020204030204" pitchFamily="49" charset="0"/>
-              </a:rPr>
-              <a:t>};</a:t>
-            </a:r>
-          </a:p>
-          <a:p>
-            <a:br>
-              <a:rPr lang="en-US" b="0" dirty="0">
-                <a:solidFill>
-                  <a:srgbClr val="000000"/>
-                </a:solidFill>
-                <a:effectLst/>
-                <a:latin typeface="Consolas" panose="020B0609020204030204" pitchFamily="49" charset="0"/>
-              </a:rPr>
-            </a:br>
-            <a:r>
-              <a:rPr lang="en-US" b="0" dirty="0">
-                <a:solidFill>
-                  <a:srgbClr val="0000FF"/>
-                </a:solidFill>
-                <a:effectLst/>
-                <a:latin typeface="Consolas" panose="020B0609020204030204" pitchFamily="49" charset="0"/>
-              </a:rPr>
-              <a:t>class</a:t>
-            </a:r>
-            <a:r>
-              <a:rPr lang="en-US" b="0" dirty="0">
-                <a:solidFill>
-                  <a:srgbClr val="000000"/>
-                </a:solidFill>
-                <a:effectLst/>
-                <a:latin typeface="Consolas" panose="020B0609020204030204" pitchFamily="49" charset="0"/>
-              </a:rPr>
-              <a:t> Circle {</a:t>
-            </a:r>
-          </a:p>
-          <a:p>
-            <a:r>
-              <a:rPr lang="en-US" b="0" dirty="0">
-                <a:solidFill>
-                  <a:srgbClr val="000000"/>
-                </a:solidFill>
-                <a:effectLst/>
-                <a:latin typeface="Consolas" panose="020B0609020204030204" pitchFamily="49" charset="0"/>
-              </a:rPr>
-              <a:t>    Point </a:t>
-            </a:r>
-            <a:r>
-              <a:rPr lang="en-US" b="0" dirty="0" err="1">
-                <a:solidFill>
-                  <a:srgbClr val="000000"/>
-                </a:solidFill>
-                <a:effectLst/>
-                <a:latin typeface="Consolas" panose="020B0609020204030204" pitchFamily="49" charset="0"/>
-              </a:rPr>
-              <a:t>m_center</a:t>
-            </a:r>
-            <a:r>
-              <a:rPr lang="en-US" b="0" dirty="0">
-                <a:solidFill>
-                  <a:srgbClr val="000000"/>
-                </a:solidFill>
-                <a:effectLst/>
-                <a:latin typeface="Consolas" panose="020B0609020204030204" pitchFamily="49" charset="0"/>
-              </a:rPr>
-              <a:t>;</a:t>
-            </a:r>
-          </a:p>
-          <a:p>
-            <a:r>
-              <a:rPr lang="en-US" b="0" dirty="0">
-                <a:solidFill>
-                  <a:srgbClr val="000000"/>
-                </a:solidFill>
-                <a:effectLst/>
-                <a:latin typeface="Consolas" panose="020B0609020204030204" pitchFamily="49" charset="0"/>
-              </a:rPr>
-              <a:t>    </a:t>
-            </a:r>
-            <a:r>
-              <a:rPr lang="en-US" b="0" dirty="0">
-                <a:solidFill>
-                  <a:srgbClr val="0000FF"/>
-                </a:solidFill>
-                <a:effectLst/>
-                <a:latin typeface="Consolas" panose="020B0609020204030204" pitchFamily="49" charset="0"/>
-              </a:rPr>
-              <a:t>double</a:t>
-            </a:r>
-            <a:r>
-              <a:rPr lang="en-US" b="0" dirty="0">
-                <a:solidFill>
-                  <a:srgbClr val="000000"/>
-                </a:solidFill>
-                <a:effectLst/>
-                <a:latin typeface="Consolas" panose="020B0609020204030204" pitchFamily="49" charset="0"/>
-              </a:rPr>
-              <a:t> </a:t>
-            </a:r>
-            <a:r>
-              <a:rPr lang="en-US" b="0" dirty="0" err="1">
-                <a:solidFill>
-                  <a:srgbClr val="000000"/>
-                </a:solidFill>
-                <a:effectLst/>
-                <a:latin typeface="Consolas" panose="020B0609020204030204" pitchFamily="49" charset="0"/>
-              </a:rPr>
-              <a:t>m_radius</a:t>
-            </a:r>
-            <a:r>
-              <a:rPr lang="en-US" b="0" dirty="0">
-                <a:solidFill>
-                  <a:srgbClr val="000000"/>
-                </a:solidFill>
-                <a:effectLst/>
-                <a:latin typeface="Consolas" panose="020B0609020204030204" pitchFamily="49" charset="0"/>
-              </a:rPr>
-              <a:t>;</a:t>
-            </a:r>
-          </a:p>
-          <a:p>
-            <a:r>
-              <a:rPr lang="en-US" b="0" dirty="0">
-                <a:solidFill>
-                  <a:srgbClr val="000000"/>
-                </a:solidFill>
-                <a:effectLst/>
-                <a:latin typeface="Consolas" panose="020B0609020204030204" pitchFamily="49" charset="0"/>
-              </a:rPr>
-              <a:t>};</a:t>
-            </a:r>
-          </a:p>
-          <a:p>
-            <a:br>
-              <a:rPr lang="en-US" b="0" dirty="0">
-                <a:solidFill>
-                  <a:srgbClr val="000000"/>
-                </a:solidFill>
-                <a:effectLst/>
-                <a:latin typeface="Consolas" panose="020B0609020204030204" pitchFamily="49" charset="0"/>
-              </a:rPr>
-            </a:br>
-            <a:r>
-              <a:rPr lang="en-US" b="0" dirty="0">
-                <a:solidFill>
-                  <a:srgbClr val="0000FF"/>
-                </a:solidFill>
-                <a:effectLst/>
-                <a:latin typeface="Consolas" panose="020B0609020204030204" pitchFamily="49" charset="0"/>
-              </a:rPr>
-              <a:t>struct</a:t>
-            </a:r>
-            <a:r>
-              <a:rPr lang="en-US" b="0" dirty="0">
-                <a:solidFill>
-                  <a:srgbClr val="000000"/>
-                </a:solidFill>
-                <a:effectLst/>
-                <a:latin typeface="Consolas" panose="020B0609020204030204" pitchFamily="49" charset="0"/>
-              </a:rPr>
-              <a:t> Complex {</a:t>
-            </a:r>
-          </a:p>
-          <a:p>
-            <a:r>
-              <a:rPr lang="en-US" b="0" dirty="0">
-                <a:solidFill>
-                  <a:srgbClr val="000000"/>
-                </a:solidFill>
-                <a:effectLst/>
-                <a:latin typeface="Consolas" panose="020B0609020204030204" pitchFamily="49" charset="0"/>
-              </a:rPr>
-              <a:t>    </a:t>
-            </a:r>
-            <a:r>
-              <a:rPr lang="en-US" b="0" dirty="0">
-                <a:solidFill>
-                  <a:srgbClr val="0000FF"/>
-                </a:solidFill>
-                <a:effectLst/>
-                <a:latin typeface="Consolas" panose="020B0609020204030204" pitchFamily="49" charset="0"/>
-              </a:rPr>
-              <a:t>double</a:t>
-            </a:r>
-            <a:r>
-              <a:rPr lang="en-US" b="0" dirty="0">
-                <a:solidFill>
-                  <a:srgbClr val="000000"/>
-                </a:solidFill>
-                <a:effectLst/>
-                <a:latin typeface="Consolas" panose="020B0609020204030204" pitchFamily="49" charset="0"/>
-              </a:rPr>
-              <a:t> real;</a:t>
-            </a:r>
-          </a:p>
-          <a:p>
-            <a:r>
-              <a:rPr lang="en-US" b="0" dirty="0">
-                <a:solidFill>
-                  <a:srgbClr val="000000"/>
-                </a:solidFill>
-                <a:effectLst/>
-                <a:latin typeface="Consolas" panose="020B0609020204030204" pitchFamily="49" charset="0"/>
-              </a:rPr>
-              <a:t>    </a:t>
-            </a:r>
-            <a:r>
-              <a:rPr lang="en-US" b="0" dirty="0">
-                <a:solidFill>
-                  <a:srgbClr val="0000FF"/>
-                </a:solidFill>
-                <a:effectLst/>
-                <a:latin typeface="Consolas" panose="020B0609020204030204" pitchFamily="49" charset="0"/>
-              </a:rPr>
-              <a:t>double</a:t>
-            </a:r>
-            <a:r>
-              <a:rPr lang="en-US" b="0" dirty="0">
-                <a:solidFill>
-                  <a:srgbClr val="000000"/>
-                </a:solidFill>
-                <a:effectLst/>
-                <a:latin typeface="Consolas" panose="020B0609020204030204" pitchFamily="49" charset="0"/>
-              </a:rPr>
-              <a:t> </a:t>
-            </a:r>
-            <a:r>
-              <a:rPr lang="en-US" b="0" dirty="0" err="1">
-                <a:solidFill>
-                  <a:srgbClr val="000000"/>
-                </a:solidFill>
-                <a:effectLst/>
-                <a:latin typeface="Consolas" panose="020B0609020204030204" pitchFamily="49" charset="0"/>
-              </a:rPr>
-              <a:t>im</a:t>
-            </a:r>
-            <a:r>
-              <a:rPr lang="en-US" b="0" dirty="0">
-                <a:solidFill>
-                  <a:srgbClr val="000000"/>
-                </a:solidFill>
-                <a:effectLst/>
-                <a:latin typeface="Consolas" panose="020B0609020204030204" pitchFamily="49" charset="0"/>
-              </a:rPr>
-              <a:t>;</a:t>
-            </a:r>
-          </a:p>
-          <a:p>
-            <a:r>
-              <a:rPr lang="en-US" b="0" dirty="0">
-                <a:solidFill>
-                  <a:srgbClr val="000000"/>
-                </a:solidFill>
-                <a:effectLst/>
-                <a:latin typeface="Consolas" panose="020B0609020204030204" pitchFamily="49" charset="0"/>
-              </a:rPr>
-              <a:t>};</a:t>
-            </a:r>
-          </a:p>
-          <a:p>
-            <a:br>
-              <a:rPr lang="en-US" b="0" dirty="0">
-                <a:solidFill>
-                  <a:srgbClr val="000000"/>
-                </a:solidFill>
-                <a:effectLst/>
-                <a:latin typeface="Consolas" panose="020B0609020204030204" pitchFamily="49" charset="0"/>
-              </a:rPr>
-            </a:br>
-            <a:r>
-              <a:rPr lang="en-US" b="0" dirty="0">
-                <a:solidFill>
-                  <a:srgbClr val="0000FF"/>
-                </a:solidFill>
-                <a:effectLst/>
-                <a:latin typeface="Consolas" panose="020B0609020204030204" pitchFamily="49" charset="0"/>
-              </a:rPr>
-              <a:t>class</a:t>
-            </a:r>
-            <a:r>
-              <a:rPr lang="en-US" b="0" dirty="0">
-                <a:solidFill>
-                  <a:srgbClr val="000000"/>
-                </a:solidFill>
-                <a:effectLst/>
-                <a:latin typeface="Consolas" panose="020B0609020204030204" pitchFamily="49" charset="0"/>
-              </a:rPr>
-              <a:t> Rational {</a:t>
-            </a:r>
-          </a:p>
-          <a:p>
-            <a:r>
-              <a:rPr lang="en-US" b="0" dirty="0">
-                <a:solidFill>
-                  <a:srgbClr val="000000"/>
-                </a:solidFill>
-                <a:effectLst/>
-                <a:latin typeface="Consolas" panose="020B0609020204030204" pitchFamily="49" charset="0"/>
-              </a:rPr>
-              <a:t>    </a:t>
-            </a:r>
-            <a:r>
-              <a:rPr lang="en-US" b="0" dirty="0">
-                <a:solidFill>
-                  <a:srgbClr val="0000FF"/>
-                </a:solidFill>
-                <a:effectLst/>
-                <a:latin typeface="Consolas" panose="020B0609020204030204" pitchFamily="49" charset="0"/>
-              </a:rPr>
-              <a:t>int</a:t>
-            </a:r>
-            <a:r>
-              <a:rPr lang="en-US" b="0" dirty="0">
-                <a:solidFill>
-                  <a:srgbClr val="000000"/>
-                </a:solidFill>
-                <a:effectLst/>
-                <a:latin typeface="Consolas" panose="020B0609020204030204" pitchFamily="49" charset="0"/>
-              </a:rPr>
-              <a:t> </a:t>
-            </a:r>
-            <a:r>
-              <a:rPr lang="en-US" b="0" dirty="0" err="1">
-                <a:solidFill>
-                  <a:srgbClr val="000000"/>
-                </a:solidFill>
-                <a:effectLst/>
-                <a:latin typeface="Consolas" panose="020B0609020204030204" pitchFamily="49" charset="0"/>
-              </a:rPr>
-              <a:t>m_numerator</a:t>
-            </a:r>
-            <a:r>
-              <a:rPr lang="en-US" b="0" dirty="0">
-                <a:solidFill>
-                  <a:srgbClr val="000000"/>
-                </a:solidFill>
-                <a:effectLst/>
-                <a:latin typeface="Consolas" panose="020B0609020204030204" pitchFamily="49" charset="0"/>
-              </a:rPr>
-              <a:t>;</a:t>
-            </a:r>
-          </a:p>
-          <a:p>
-            <a:r>
-              <a:rPr lang="en-US" b="0" dirty="0">
-                <a:solidFill>
-                  <a:srgbClr val="000000"/>
-                </a:solidFill>
-                <a:effectLst/>
-                <a:latin typeface="Consolas" panose="020B0609020204030204" pitchFamily="49" charset="0"/>
-              </a:rPr>
-              <a:t>    </a:t>
-            </a:r>
-            <a:r>
-              <a:rPr lang="en-US" b="0" dirty="0">
-                <a:solidFill>
-                  <a:srgbClr val="0000FF"/>
-                </a:solidFill>
-                <a:effectLst/>
-                <a:latin typeface="Consolas" panose="020B0609020204030204" pitchFamily="49" charset="0"/>
-              </a:rPr>
-              <a:t>int</a:t>
-            </a:r>
-            <a:r>
-              <a:rPr lang="en-US" b="0" dirty="0">
-                <a:solidFill>
-                  <a:srgbClr val="000000"/>
-                </a:solidFill>
-                <a:effectLst/>
-                <a:latin typeface="Consolas" panose="020B0609020204030204" pitchFamily="49" charset="0"/>
-              </a:rPr>
-              <a:t> </a:t>
-            </a:r>
-            <a:r>
-              <a:rPr lang="en-US" b="0" dirty="0" err="1">
-                <a:solidFill>
-                  <a:srgbClr val="000000"/>
-                </a:solidFill>
-                <a:effectLst/>
-                <a:latin typeface="Consolas" panose="020B0609020204030204" pitchFamily="49" charset="0"/>
-              </a:rPr>
-              <a:t>m_denominator</a:t>
-            </a:r>
-            <a:r>
-              <a:rPr lang="en-US" b="0" dirty="0">
-                <a:solidFill>
-                  <a:srgbClr val="000000"/>
-                </a:solidFill>
-                <a:effectLst/>
-                <a:latin typeface="Consolas" panose="020B0609020204030204" pitchFamily="49" charset="0"/>
-              </a:rPr>
-              <a:t>;</a:t>
-            </a:r>
-          </a:p>
-          <a:p>
-            <a:r>
-              <a:rPr lang="en-US" b="0" dirty="0">
-                <a:solidFill>
-                  <a:srgbClr val="000000"/>
-                </a:solidFill>
-                <a:effectLst/>
-                <a:latin typeface="Consolas" panose="020B0609020204030204" pitchFamily="49" charset="0"/>
-              </a:rPr>
-              <a:t>};</a:t>
-            </a:r>
-          </a:p>
-          <a:p>
-            <a:br>
-              <a:rPr lang="en-US" b="0" dirty="0">
-                <a:solidFill>
-                  <a:srgbClr val="000000"/>
-                </a:solidFill>
-                <a:effectLst/>
-                <a:latin typeface="Consolas" panose="020B0609020204030204" pitchFamily="49" charset="0"/>
-              </a:rPr>
-            </a:br>
-            <a:r>
-              <a:rPr lang="en-US" b="0" dirty="0">
-                <a:solidFill>
-                  <a:srgbClr val="0000FF"/>
-                </a:solidFill>
-                <a:effectLst/>
-                <a:latin typeface="Consolas" panose="020B0609020204030204" pitchFamily="49" charset="0"/>
-              </a:rPr>
-              <a:t>class</a:t>
-            </a:r>
-            <a:r>
-              <a:rPr lang="en-US" b="0" dirty="0">
-                <a:solidFill>
-                  <a:srgbClr val="000000"/>
-                </a:solidFill>
-                <a:effectLst/>
-                <a:latin typeface="Consolas" panose="020B0609020204030204" pitchFamily="49" charset="0"/>
-              </a:rPr>
-              <a:t> Polygon {</a:t>
-            </a:r>
-          </a:p>
-          <a:p>
-            <a:r>
-              <a:rPr lang="en-US" b="0" dirty="0">
-                <a:solidFill>
-                  <a:srgbClr val="000000"/>
-                </a:solidFill>
-                <a:effectLst/>
-                <a:latin typeface="Consolas" panose="020B0609020204030204" pitchFamily="49" charset="0"/>
-              </a:rPr>
-              <a:t>    std::vector&lt;Point&gt; </a:t>
-            </a:r>
-            <a:r>
-              <a:rPr lang="en-US" b="0" dirty="0" err="1">
-                <a:solidFill>
-                  <a:srgbClr val="000000"/>
-                </a:solidFill>
-                <a:effectLst/>
-                <a:latin typeface="Consolas" panose="020B0609020204030204" pitchFamily="49" charset="0"/>
-              </a:rPr>
-              <a:t>m_vertices</a:t>
-            </a:r>
-            <a:r>
-              <a:rPr lang="en-US" b="0" dirty="0">
-                <a:solidFill>
-                  <a:srgbClr val="000000"/>
-                </a:solidFill>
-                <a:effectLst/>
-                <a:latin typeface="Consolas" panose="020B0609020204030204" pitchFamily="49" charset="0"/>
-              </a:rPr>
-              <a:t>;</a:t>
-            </a:r>
-          </a:p>
-          <a:p>
-            <a:r>
-              <a:rPr lang="en-US" b="0" dirty="0">
-                <a:solidFill>
-                  <a:srgbClr val="000000"/>
-                </a:solidFill>
-                <a:effectLst/>
-                <a:latin typeface="Consolas" panose="020B0609020204030204" pitchFamily="49" charset="0"/>
-              </a:rPr>
-              <a:t>};</a:t>
-            </a:r>
-          </a:p>
-        </p:txBody>
-      </p:sp>
-    </p:spTree>
-    <p:extLst>
-      <p:ext uri="{BB962C8B-B14F-4D97-AF65-F5344CB8AC3E}">
-        <p14:creationId xmlns:p14="http://schemas.microsoft.com/office/powerpoint/2010/main" val="3886857560"/>
-      </p:ext>
-    </p:extLst>
-  </p:cSld>
-  <p:clrMapOvr>
-    <a:masterClrMapping/>
-  </p:clrMapOvr>
-</p:sld>
-</file>
-
-<file path=ppt/slides/slide7.xml><?xml version="1.0" encoding="utf-8"?>
-<p:sld xmlns:a="http://schemas.openxmlformats.org/drawingml/2006/main" xmlns:r="http://schemas.openxmlformats.org/officeDocument/2006/relationships" xmlns:p="http://schemas.openxmlformats.org/presentationml/2006/main">
-  <p:cSld>
-    <p:spTree>
-      <p:nvGrpSpPr>
-        <p:cNvPr id="1" name=""/>
-        <p:cNvGrpSpPr/>
-        <p:nvPr/>
-      </p:nvGrpSpPr>
-      <p:grpSpPr>
-        <a:xfrm>
-          <a:off x="0" y="0"/>
-          <a:ext cx="0" cy="0"/>
-          <a:chOff x="0" y="0"/>
-          <a:chExt cx="0" cy="0"/>
-        </a:xfrm>
-      </p:grpSpPr>
-      <p:sp>
-        <p:nvSpPr>
           <p:cNvPr id="4" name="Заголовок 3">
             <a:extLst>
               <a:ext uri="{FF2B5EF4-FFF2-40B4-BE49-F238E27FC236}">
@@ -12857,7 +12550,7 @@
 </p:sld>
 </file>
 
-<file path=ppt/slides/slide8.xml><?xml version="1.0" encoding="utf-8"?>
+<file path=ppt/slides/slide7.xml><?xml version="1.0" encoding="utf-8"?>
 <p:sld xmlns:a="http://schemas.openxmlformats.org/drawingml/2006/main" xmlns:r="http://schemas.openxmlformats.org/officeDocument/2006/relationships" xmlns:p="http://schemas.openxmlformats.org/presentationml/2006/main">
   <p:cSld>
     <p:spTree>
@@ -12953,6 +12646,89 @@
 </p:sld>
 </file>
 
+<file path=ppt/slides/slide8.xml><?xml version="1.0" encoding="utf-8"?>
+<p:sld xmlns:a="http://schemas.openxmlformats.org/drawingml/2006/main" xmlns:r="http://schemas.openxmlformats.org/officeDocument/2006/relationships" xmlns:p="http://schemas.openxmlformats.org/presentationml/2006/main">
+  <p:cSld>
+    <p:spTree>
+      <p:nvGrpSpPr>
+        <p:cNvPr id="1" name=""/>
+        <p:cNvGrpSpPr/>
+        <p:nvPr/>
+      </p:nvGrpSpPr>
+      <p:grpSpPr>
+        <a:xfrm>
+          <a:off x="0" y="0"/>
+          <a:ext cx="0" cy="0"/>
+          <a:chOff x="0" y="0"/>
+          <a:chExt cx="0" cy="0"/>
+        </a:xfrm>
+      </p:grpSpPr>
+      <p:sp>
+        <p:nvSpPr>
+          <p:cNvPr id="2" name="Заголовок 1">
+            <a:extLst>
+              <a:ext uri="{FF2B5EF4-FFF2-40B4-BE49-F238E27FC236}">
+                <a16:creationId xmlns:a16="http://schemas.microsoft.com/office/drawing/2014/main" id="{7DFA4413-24DE-4ED2-B703-609DAF7FCBE2}"/>
+              </a:ext>
+            </a:extLst>
+          </p:cNvPr>
+          <p:cNvSpPr>
+            <a:spLocks noGrp="1"/>
+          </p:cNvSpPr>
+          <p:nvPr>
+            <p:ph type="title"/>
+          </p:nvPr>
+        </p:nvSpPr>
+        <p:spPr/>
+        <p:txBody>
+          <a:bodyPr/>
+          <a:lstStyle/>
+          <a:p>
+            <a:r>
+              <a:rPr lang="ru-RU" dirty="0"/>
+              <a:t>Агрегация</a:t>
+            </a:r>
+          </a:p>
+        </p:txBody>
+      </p:sp>
+      <p:sp>
+        <p:nvSpPr>
+          <p:cNvPr id="3" name="Текст 2">
+            <a:extLst>
+              <a:ext uri="{FF2B5EF4-FFF2-40B4-BE49-F238E27FC236}">
+                <a16:creationId xmlns:a16="http://schemas.microsoft.com/office/drawing/2014/main" id="{8C8A4E74-53CF-43B7-8A16-81BF6EC55242}"/>
+              </a:ext>
+            </a:extLst>
+          </p:cNvPr>
+          <p:cNvSpPr>
+            <a:spLocks noGrp="1"/>
+          </p:cNvSpPr>
+          <p:nvPr>
+            <p:ph type="body" idx="1"/>
+          </p:nvPr>
+        </p:nvSpPr>
+        <p:spPr/>
+        <p:txBody>
+          <a:bodyPr/>
+          <a:lstStyle/>
+          <a:p>
+            <a:endParaRPr lang="ru-RU"/>
+          </a:p>
+        </p:txBody>
+      </p:sp>
+    </p:spTree>
+    <p:extLst>
+      <p:ext uri="{BB962C8B-B14F-4D97-AF65-F5344CB8AC3E}">
+        <p14:creationId xmlns:p14="http://schemas.microsoft.com/office/powerpoint/2010/main" val="3778601015"/>
+      </p:ext>
+    </p:extLst>
+  </p:cSld>
+  <p:clrMapOvr>
+    <a:masterClrMapping/>
+  </p:clrMapOvr>
+</p:sld>
+</file>
+
 <file path=ppt/slides/slide9.xml><?xml version="1.0" encoding="utf-8"?>
 <p:sld xmlns:a="http://schemas.openxmlformats.org/drawingml/2006/main" xmlns:r="http://schemas.openxmlformats.org/officeDocument/2006/relationships" xmlns:p="http://schemas.openxmlformats.org/presentationml/2006/main">
   <p:cSld>
@@ -12975,7 +12751,7 @@
           <p:cNvPr id="2" name="Заголовок 1">
             <a:extLst>
               <a:ext uri="{FF2B5EF4-FFF2-40B4-BE49-F238E27FC236}">
-                <a16:creationId xmlns:a16="http://schemas.microsoft.com/office/drawing/2014/main" id="{7DFA4413-24DE-4ED2-B703-609DAF7FCBE2}"/>
+                <a16:creationId xmlns:a16="http://schemas.microsoft.com/office/drawing/2014/main" id="{D73E1AC1-1020-4294-A077-007A71C780F3}"/>
               </a:ext>
             </a:extLst>
           </p:cNvPr>
@@ -12993,40 +12769,51 @@
           <a:p>
             <a:r>
               <a:rPr lang="ru-RU" dirty="0"/>
-              <a:t>Агрегация</a:t>
-            </a:r>
-          </a:p>
-        </p:txBody>
-      </p:sp>
-      <p:sp>
-        <p:nvSpPr>
-          <p:cNvPr id="3" name="Текст 2">
+              <a:t>Агрегация и делегирование</a:t>
+            </a:r>
+          </a:p>
+        </p:txBody>
+      </p:sp>
+      <p:pic>
+        <p:nvPicPr>
+          <p:cNvPr id="5" name="Рисунок 4">
             <a:extLst>
               <a:ext uri="{FF2B5EF4-FFF2-40B4-BE49-F238E27FC236}">
-                <a16:creationId xmlns:a16="http://schemas.microsoft.com/office/drawing/2014/main" id="{8C8A4E74-53CF-43B7-8A16-81BF6EC55242}"/>
+                <a16:creationId xmlns:a16="http://schemas.microsoft.com/office/drawing/2014/main" id="{CA871CF4-AACF-395E-5682-5A4F4F5F35D0}"/>
               </a:ext>
             </a:extLst>
           </p:cNvPr>
-          <p:cNvSpPr>
-            <a:spLocks noGrp="1"/>
-          </p:cNvSpPr>
-          <p:nvPr>
-            <p:ph type="body" idx="1"/>
-          </p:nvPr>
-        </p:nvSpPr>
-        <p:spPr/>
-        <p:txBody>
-          <a:bodyPr/>
-          <a:lstStyle/>
-          <a:p>
-            <a:endParaRPr lang="ru-RU"/>
-          </a:p>
-        </p:txBody>
-      </p:sp>
+          <p:cNvPicPr>
+            <a:picLocks noChangeAspect="1"/>
+          </p:cNvPicPr>
+          <p:nvPr/>
+        </p:nvPicPr>
+        <p:blipFill>
+          <a:blip r:embed="rId3">
+            <a:extLst>
+              <a:ext uri="{28A0092B-C50C-407E-A947-70E740481C1C}">
+                <a14:useLocalDpi xmlns:a14="http://schemas.microsoft.com/office/drawing/2010/main" val="0"/>
+              </a:ext>
+            </a:extLst>
+          </a:blip>
+          <a:stretch>
+            <a:fillRect/>
+          </a:stretch>
+        </p:blipFill>
+        <p:spPr>
+          <a:xfrm>
+            <a:off x="2938264" y="2492896"/>
+            <a:ext cx="6470104" cy="3702850"/>
+          </a:xfrm>
+          <a:prstGeom prst="rect">
+            <a:avLst/>
+          </a:prstGeom>
+        </p:spPr>
+      </p:pic>
     </p:spTree>
     <p:extLst>
       <p:ext uri="{BB962C8B-B14F-4D97-AF65-F5344CB8AC3E}">
-        <p14:creationId xmlns:p14="http://schemas.microsoft.com/office/powerpoint/2010/main" val="3778601015"/>
+        <p14:creationId xmlns:p14="http://schemas.microsoft.com/office/powerpoint/2010/main" val="3997726164"/>
       </p:ext>
     </p:extLst>
   </p:cSld>
